--- a/ComputerProgramming-SmartManufacturing/Class 06 Numpy/Numpy Matrix Algo flowchart.pptx
+++ b/ComputerProgramming-SmartManufacturing/Class 06 Numpy/Numpy Matrix Algo flowchart.pptx
@@ -111,6 +111,11 @@
       </a:defRPr>
     </a:lvl9pPr>
   </p:defaultTextStyle>
+  <p:extLst>
+    <p:ext uri="{EFAFB233-063F-42B5-8137-9DF3F51BA10A}">
+      <p15:sldGuideLst xmlns:p15="http://schemas.microsoft.com/office/powerpoint/2012/main"/>
+    </p:ext>
+  </p:extLst>
 </p:presentation>
 </file>
 
@@ -3902,7 +3907,7 @@
           <a:p>
             <a:fld id="{BD92F12E-DBF8-4B82-9BC7-6630DEA31500}" type="datetimeFigureOut">
               <a:rPr lang="en-US" smtClean="0"/>
-              <a:t>6/15/2025</a:t>
+              <a:t>8/12/2025</a:t>
             </a:fld>
             <a:endParaRPr lang="en-US"/>
           </a:p>
@@ -4100,7 +4105,7 @@
           <a:p>
             <a:fld id="{BD92F12E-DBF8-4B82-9BC7-6630DEA31500}" type="datetimeFigureOut">
               <a:rPr lang="en-US" smtClean="0"/>
-              <a:t>6/15/2025</a:t>
+              <a:t>8/12/2025</a:t>
             </a:fld>
             <a:endParaRPr lang="en-US"/>
           </a:p>
@@ -4308,7 +4313,7 @@
           <a:p>
             <a:fld id="{BD92F12E-DBF8-4B82-9BC7-6630DEA31500}" type="datetimeFigureOut">
               <a:rPr lang="en-US" smtClean="0"/>
-              <a:t>6/15/2025</a:t>
+              <a:t>8/12/2025</a:t>
             </a:fld>
             <a:endParaRPr lang="en-US"/>
           </a:p>
@@ -4506,7 +4511,7 @@
           <a:p>
             <a:fld id="{BD92F12E-DBF8-4B82-9BC7-6630DEA31500}" type="datetimeFigureOut">
               <a:rPr lang="en-US" smtClean="0"/>
-              <a:t>6/15/2025</a:t>
+              <a:t>8/12/2025</a:t>
             </a:fld>
             <a:endParaRPr lang="en-US"/>
           </a:p>
@@ -4781,7 +4786,7 @@
           <a:p>
             <a:fld id="{BD92F12E-DBF8-4B82-9BC7-6630DEA31500}" type="datetimeFigureOut">
               <a:rPr lang="en-US" smtClean="0"/>
-              <a:t>6/15/2025</a:t>
+              <a:t>8/12/2025</a:t>
             </a:fld>
             <a:endParaRPr lang="en-US"/>
           </a:p>
@@ -5046,7 +5051,7 @@
           <a:p>
             <a:fld id="{BD92F12E-DBF8-4B82-9BC7-6630DEA31500}" type="datetimeFigureOut">
               <a:rPr lang="en-US" smtClean="0"/>
-              <a:t>6/15/2025</a:t>
+              <a:t>8/12/2025</a:t>
             </a:fld>
             <a:endParaRPr lang="en-US"/>
           </a:p>
@@ -5458,7 +5463,7 @@
           <a:p>
             <a:fld id="{BD92F12E-DBF8-4B82-9BC7-6630DEA31500}" type="datetimeFigureOut">
               <a:rPr lang="en-US" smtClean="0"/>
-              <a:t>6/15/2025</a:t>
+              <a:t>8/12/2025</a:t>
             </a:fld>
             <a:endParaRPr lang="en-US"/>
           </a:p>
@@ -5599,7 +5604,7 @@
           <a:p>
             <a:fld id="{BD92F12E-DBF8-4B82-9BC7-6630DEA31500}" type="datetimeFigureOut">
               <a:rPr lang="en-US" smtClean="0"/>
-              <a:t>6/15/2025</a:t>
+              <a:t>8/12/2025</a:t>
             </a:fld>
             <a:endParaRPr lang="en-US"/>
           </a:p>
@@ -5712,7 +5717,7 @@
           <a:p>
             <a:fld id="{BD92F12E-DBF8-4B82-9BC7-6630DEA31500}" type="datetimeFigureOut">
               <a:rPr lang="en-US" smtClean="0"/>
-              <a:t>6/15/2025</a:t>
+              <a:t>8/12/2025</a:t>
             </a:fld>
             <a:endParaRPr lang="en-US"/>
           </a:p>
@@ -6023,7 +6028,7 @@
           <a:p>
             <a:fld id="{BD92F12E-DBF8-4B82-9BC7-6630DEA31500}" type="datetimeFigureOut">
               <a:rPr lang="en-US" smtClean="0"/>
-              <a:t>6/15/2025</a:t>
+              <a:t>8/12/2025</a:t>
             </a:fld>
             <a:endParaRPr lang="en-US"/>
           </a:p>
@@ -6311,7 +6316,7 @@
           <a:p>
             <a:fld id="{BD92F12E-DBF8-4B82-9BC7-6630DEA31500}" type="datetimeFigureOut">
               <a:rPr lang="en-US" smtClean="0"/>
-              <a:t>6/15/2025</a:t>
+              <a:t>8/12/2025</a:t>
             </a:fld>
             <a:endParaRPr lang="en-US"/>
           </a:p>
@@ -6552,7 +6557,7 @@
           <a:p>
             <a:fld id="{BD92F12E-DBF8-4B82-9BC7-6630DEA31500}" type="datetimeFigureOut">
               <a:rPr lang="en-US" smtClean="0"/>
-              <a:t>6/15/2025</a:t>
+              <a:t>8/12/2025</a:t>
             </a:fld>
             <a:endParaRPr lang="en-US"/>
           </a:p>
@@ -6989,8 +6994,8 @@
             <a:chExt cx="378720" cy="672120"/>
           </a:xfrm>
         </p:grpSpPr>
-        <mc:AlternateContent xmlns:mc="http://schemas.openxmlformats.org/markup-compatibility/2006">
-          <mc:Choice xmlns:p14="http://schemas.microsoft.com/office/powerpoint/2010/main" Requires="p14">
+        <mc:AlternateContent xmlns:mc="http://schemas.openxmlformats.org/markup-compatibility/2006" xmlns:p14="http://schemas.microsoft.com/office/powerpoint/2010/main">
+          <mc:Choice Requires="p14">
             <p:contentPart p14:bwMode="auto" r:id="rId2">
               <p14:nvContentPartPr>
                 <p14:cNvPr id="2" name="Ink 1">
@@ -7009,7 +7014,7 @@
               </p14:xfrm>
             </p:contentPart>
           </mc:Choice>
-          <mc:Fallback>
+          <mc:Fallback xmlns="">
             <p:pic>
               <p:nvPicPr>
                 <p:cNvPr id="2" name="Ink 1">
@@ -7040,8 +7045,8 @@
             </p:pic>
           </mc:Fallback>
         </mc:AlternateContent>
-        <mc:AlternateContent xmlns:mc="http://schemas.openxmlformats.org/markup-compatibility/2006">
-          <mc:Choice xmlns:p14="http://schemas.microsoft.com/office/powerpoint/2010/main" Requires="p14">
+        <mc:AlternateContent xmlns:mc="http://schemas.openxmlformats.org/markup-compatibility/2006" xmlns:p14="http://schemas.microsoft.com/office/powerpoint/2010/main">
+          <mc:Choice Requires="p14">
             <p:contentPart p14:bwMode="auto" r:id="rId4">
               <p14:nvContentPartPr>
                 <p14:cNvPr id="3" name="Ink 2">
@@ -7060,7 +7065,7 @@
               </p14:xfrm>
             </p:contentPart>
           </mc:Choice>
-          <mc:Fallback>
+          <mc:Fallback xmlns="">
             <p:pic>
               <p:nvPicPr>
                 <p:cNvPr id="3" name="Ink 2">
@@ -7092,8 +7097,8 @@
           </mc:Fallback>
         </mc:AlternateContent>
       </p:grpSp>
-      <mc:AlternateContent xmlns:mc="http://schemas.openxmlformats.org/markup-compatibility/2006">
-        <mc:Choice xmlns:p14="http://schemas.microsoft.com/office/powerpoint/2010/main" Requires="p14">
+      <mc:AlternateContent xmlns:mc="http://schemas.openxmlformats.org/markup-compatibility/2006" xmlns:p14="http://schemas.microsoft.com/office/powerpoint/2010/main">
+        <mc:Choice Requires="p14">
           <p:contentPart p14:bwMode="auto" r:id="rId6">
             <p14:nvContentPartPr>
               <p14:cNvPr id="4" name="Ink 3">
@@ -7112,7 +7117,7 @@
             </p14:xfrm>
           </p:contentPart>
         </mc:Choice>
-        <mc:Fallback>
+        <mc:Fallback xmlns="">
           <p:pic>
             <p:nvPicPr>
               <p:cNvPr id="4" name="Ink 3">
@@ -7143,8 +7148,8 @@
           </p:pic>
         </mc:Fallback>
       </mc:AlternateContent>
-      <mc:AlternateContent xmlns:mc="http://schemas.openxmlformats.org/markup-compatibility/2006">
-        <mc:Choice xmlns:p14="http://schemas.microsoft.com/office/powerpoint/2010/main" Requires="p14">
+      <mc:AlternateContent xmlns:mc="http://schemas.openxmlformats.org/markup-compatibility/2006" xmlns:p14="http://schemas.microsoft.com/office/powerpoint/2010/main">
+        <mc:Choice Requires="p14">
           <p:contentPart p14:bwMode="auto" r:id="rId8">
             <p14:nvContentPartPr>
               <p14:cNvPr id="5" name="Ink 4">
@@ -7163,7 +7168,7 @@
             </p14:xfrm>
           </p:contentPart>
         </mc:Choice>
-        <mc:Fallback>
+        <mc:Fallback xmlns="">
           <p:pic>
             <p:nvPicPr>
               <p:cNvPr id="5" name="Ink 4">
@@ -7214,8 +7219,8 @@
             <a:chExt cx="841320" cy="1401480"/>
           </a:xfrm>
         </p:grpSpPr>
-        <mc:AlternateContent xmlns:mc="http://schemas.openxmlformats.org/markup-compatibility/2006">
-          <mc:Choice xmlns:p14="http://schemas.microsoft.com/office/powerpoint/2010/main" Requires="p14">
+        <mc:AlternateContent xmlns:mc="http://schemas.openxmlformats.org/markup-compatibility/2006" xmlns:p14="http://schemas.microsoft.com/office/powerpoint/2010/main">
+          <mc:Choice Requires="p14">
             <p:contentPart p14:bwMode="auto" r:id="rId10">
               <p14:nvContentPartPr>
                 <p14:cNvPr id="7" name="Ink 6">
@@ -7234,7 +7239,7 @@
               </p14:xfrm>
             </p:contentPart>
           </mc:Choice>
-          <mc:Fallback>
+          <mc:Fallback xmlns="">
             <p:pic>
               <p:nvPicPr>
                 <p:cNvPr id="7" name="Ink 6">
@@ -7265,8 +7270,8 @@
             </p:pic>
           </mc:Fallback>
         </mc:AlternateContent>
-        <mc:AlternateContent xmlns:mc="http://schemas.openxmlformats.org/markup-compatibility/2006">
-          <mc:Choice xmlns:p14="http://schemas.microsoft.com/office/powerpoint/2010/main" Requires="p14">
+        <mc:AlternateContent xmlns:mc="http://schemas.openxmlformats.org/markup-compatibility/2006" xmlns:p14="http://schemas.microsoft.com/office/powerpoint/2010/main">
+          <mc:Choice Requires="p14">
             <p:contentPart p14:bwMode="auto" r:id="rId12">
               <p14:nvContentPartPr>
                 <p14:cNvPr id="8" name="Ink 7">
@@ -7285,7 +7290,7 @@
               </p14:xfrm>
             </p:contentPart>
           </mc:Choice>
-          <mc:Fallback>
+          <mc:Fallback xmlns="">
             <p:pic>
               <p:nvPicPr>
                 <p:cNvPr id="8" name="Ink 7">
@@ -7316,8 +7321,8 @@
             </p:pic>
           </mc:Fallback>
         </mc:AlternateContent>
-        <mc:AlternateContent xmlns:mc="http://schemas.openxmlformats.org/markup-compatibility/2006">
-          <mc:Choice xmlns:p14="http://schemas.microsoft.com/office/powerpoint/2010/main" Requires="p14">
+        <mc:AlternateContent xmlns:mc="http://schemas.openxmlformats.org/markup-compatibility/2006" xmlns:p14="http://schemas.microsoft.com/office/powerpoint/2010/main">
+          <mc:Choice Requires="p14">
             <p:contentPart p14:bwMode="auto" r:id="rId14">
               <p14:nvContentPartPr>
                 <p14:cNvPr id="9" name="Ink 8">
@@ -7336,7 +7341,7 @@
               </p14:xfrm>
             </p:contentPart>
           </mc:Choice>
-          <mc:Fallback>
+          <mc:Fallback xmlns="">
             <p:pic>
               <p:nvPicPr>
                 <p:cNvPr id="9" name="Ink 8">
@@ -7368,8 +7373,8 @@
           </mc:Fallback>
         </mc:AlternateContent>
       </p:grpSp>
-      <mc:AlternateContent xmlns:mc="http://schemas.openxmlformats.org/markup-compatibility/2006">
-        <mc:Choice xmlns:p14="http://schemas.microsoft.com/office/powerpoint/2010/main" Requires="p14">
+      <mc:AlternateContent xmlns:mc="http://schemas.openxmlformats.org/markup-compatibility/2006" xmlns:p14="http://schemas.microsoft.com/office/powerpoint/2010/main">
+        <mc:Choice Requires="p14">
           <p:contentPart p14:bwMode="auto" r:id="rId16">
             <p14:nvContentPartPr>
               <p14:cNvPr id="12" name="Ink 11">
@@ -7388,7 +7393,7 @@
             </p14:xfrm>
           </p:contentPart>
         </mc:Choice>
-        <mc:Fallback>
+        <mc:Fallback xmlns="">
           <p:pic>
             <p:nvPicPr>
               <p:cNvPr id="12" name="Ink 11">
@@ -7439,8 +7444,8 @@
             <a:chExt cx="1307520" cy="1715400"/>
           </a:xfrm>
         </p:grpSpPr>
-        <mc:AlternateContent xmlns:mc="http://schemas.openxmlformats.org/markup-compatibility/2006">
-          <mc:Choice xmlns:p14="http://schemas.microsoft.com/office/powerpoint/2010/main" Requires="p14">
+        <mc:AlternateContent xmlns:mc="http://schemas.openxmlformats.org/markup-compatibility/2006" xmlns:p14="http://schemas.microsoft.com/office/powerpoint/2010/main">
+          <mc:Choice Requires="p14">
             <p:contentPart p14:bwMode="auto" r:id="rId18">
               <p14:nvContentPartPr>
                 <p14:cNvPr id="10" name="Ink 9">
@@ -7459,7 +7464,7 @@
               </p14:xfrm>
             </p:contentPart>
           </mc:Choice>
-          <mc:Fallback>
+          <mc:Fallback xmlns="">
             <p:pic>
               <p:nvPicPr>
                 <p:cNvPr id="10" name="Ink 9">
@@ -7490,8 +7495,8 @@
             </p:pic>
           </mc:Fallback>
         </mc:AlternateContent>
-        <mc:AlternateContent xmlns:mc="http://schemas.openxmlformats.org/markup-compatibility/2006">
-          <mc:Choice xmlns:p14="http://schemas.microsoft.com/office/powerpoint/2010/main" Requires="p14">
+        <mc:AlternateContent xmlns:mc="http://schemas.openxmlformats.org/markup-compatibility/2006" xmlns:p14="http://schemas.microsoft.com/office/powerpoint/2010/main">
+          <mc:Choice Requires="p14">
             <p:contentPart p14:bwMode="auto" r:id="rId20">
               <p14:nvContentPartPr>
                 <p14:cNvPr id="13" name="Ink 12">
@@ -7510,7 +7515,7 @@
               </p14:xfrm>
             </p:contentPart>
           </mc:Choice>
-          <mc:Fallback>
+          <mc:Fallback xmlns="">
             <p:pic>
               <p:nvPicPr>
                 <p:cNvPr id="13" name="Ink 12">
@@ -7541,8 +7546,8 @@
             </p:pic>
           </mc:Fallback>
         </mc:AlternateContent>
-        <mc:AlternateContent xmlns:mc="http://schemas.openxmlformats.org/markup-compatibility/2006">
-          <mc:Choice xmlns:p14="http://schemas.microsoft.com/office/powerpoint/2010/main" Requires="p14">
+        <mc:AlternateContent xmlns:mc="http://schemas.openxmlformats.org/markup-compatibility/2006" xmlns:p14="http://schemas.microsoft.com/office/powerpoint/2010/main">
+          <mc:Choice Requires="p14">
             <p:contentPart p14:bwMode="auto" r:id="rId22">
               <p14:nvContentPartPr>
                 <p14:cNvPr id="14" name="Ink 13">
@@ -7561,7 +7566,7 @@
               </p14:xfrm>
             </p:contentPart>
           </mc:Choice>
-          <mc:Fallback>
+          <mc:Fallback xmlns="">
             <p:pic>
               <p:nvPicPr>
                 <p:cNvPr id="14" name="Ink 13">
@@ -7613,8 +7618,8 @@
             <a:chExt cx="2538360" cy="1978920"/>
           </a:xfrm>
         </p:grpSpPr>
-        <mc:AlternateContent xmlns:mc="http://schemas.openxmlformats.org/markup-compatibility/2006">
-          <mc:Choice xmlns:p14="http://schemas.microsoft.com/office/powerpoint/2010/main" Requires="p14">
+        <mc:AlternateContent xmlns:mc="http://schemas.openxmlformats.org/markup-compatibility/2006" xmlns:p14="http://schemas.microsoft.com/office/powerpoint/2010/main">
+          <mc:Choice Requires="p14">
             <p:contentPart p14:bwMode="auto" r:id="rId24">
               <p14:nvContentPartPr>
                 <p14:cNvPr id="16" name="Ink 15">
@@ -7633,7 +7638,7 @@
               </p14:xfrm>
             </p:contentPart>
           </mc:Choice>
-          <mc:Fallback>
+          <mc:Fallback xmlns="">
             <p:pic>
               <p:nvPicPr>
                 <p:cNvPr id="16" name="Ink 15">
@@ -7664,8 +7669,8 @@
             </p:pic>
           </mc:Fallback>
         </mc:AlternateContent>
-        <mc:AlternateContent xmlns:mc="http://schemas.openxmlformats.org/markup-compatibility/2006">
-          <mc:Choice xmlns:p14="http://schemas.microsoft.com/office/powerpoint/2010/main" Requires="p14">
+        <mc:AlternateContent xmlns:mc="http://schemas.openxmlformats.org/markup-compatibility/2006" xmlns:p14="http://schemas.microsoft.com/office/powerpoint/2010/main">
+          <mc:Choice Requires="p14">
             <p:contentPart p14:bwMode="auto" r:id="rId26">
               <p14:nvContentPartPr>
                 <p14:cNvPr id="17" name="Ink 16">
@@ -7684,7 +7689,7 @@
               </p14:xfrm>
             </p:contentPart>
           </mc:Choice>
-          <mc:Fallback>
+          <mc:Fallback xmlns="">
             <p:pic>
               <p:nvPicPr>
                 <p:cNvPr id="17" name="Ink 16">
@@ -7715,8 +7720,8 @@
             </p:pic>
           </mc:Fallback>
         </mc:AlternateContent>
-        <mc:AlternateContent xmlns:mc="http://schemas.openxmlformats.org/markup-compatibility/2006">
-          <mc:Choice xmlns:p14="http://schemas.microsoft.com/office/powerpoint/2010/main" Requires="p14">
+        <mc:AlternateContent xmlns:mc="http://schemas.openxmlformats.org/markup-compatibility/2006" xmlns:p14="http://schemas.microsoft.com/office/powerpoint/2010/main">
+          <mc:Choice Requires="p14">
             <p:contentPart p14:bwMode="auto" r:id="rId28">
               <p14:nvContentPartPr>
                 <p14:cNvPr id="18" name="Ink 17">
@@ -7735,7 +7740,7 @@
               </p14:xfrm>
             </p:contentPart>
           </mc:Choice>
-          <mc:Fallback>
+          <mc:Fallback xmlns="">
             <p:pic>
               <p:nvPicPr>
                 <p:cNvPr id="18" name="Ink 17">
@@ -7766,8 +7771,8 @@
             </p:pic>
           </mc:Fallback>
         </mc:AlternateContent>
-        <mc:AlternateContent xmlns:mc="http://schemas.openxmlformats.org/markup-compatibility/2006">
-          <mc:Choice xmlns:p14="http://schemas.microsoft.com/office/powerpoint/2010/main" Requires="p14">
+        <mc:AlternateContent xmlns:mc="http://schemas.openxmlformats.org/markup-compatibility/2006" xmlns:p14="http://schemas.microsoft.com/office/powerpoint/2010/main">
+          <mc:Choice Requires="p14">
             <p:contentPart p14:bwMode="auto" r:id="rId30">
               <p14:nvContentPartPr>
                 <p14:cNvPr id="19" name="Ink 18">
@@ -7786,7 +7791,7 @@
               </p14:xfrm>
             </p:contentPart>
           </mc:Choice>
-          <mc:Fallback>
+          <mc:Fallback xmlns="">
             <p:pic>
               <p:nvPicPr>
                 <p:cNvPr id="19" name="Ink 18">
@@ -7817,8 +7822,8 @@
             </p:pic>
           </mc:Fallback>
         </mc:AlternateContent>
-        <mc:AlternateContent xmlns:mc="http://schemas.openxmlformats.org/markup-compatibility/2006">
-          <mc:Choice xmlns:p14="http://schemas.microsoft.com/office/powerpoint/2010/main" Requires="p14">
+        <mc:AlternateContent xmlns:mc="http://schemas.openxmlformats.org/markup-compatibility/2006" xmlns:p14="http://schemas.microsoft.com/office/powerpoint/2010/main">
+          <mc:Choice Requires="p14">
             <p:contentPart p14:bwMode="auto" r:id="rId32">
               <p14:nvContentPartPr>
                 <p14:cNvPr id="21" name="Ink 20">
@@ -7837,7 +7842,7 @@
               </p14:xfrm>
             </p:contentPart>
           </mc:Choice>
-          <mc:Fallback>
+          <mc:Fallback xmlns="">
             <p:pic>
               <p:nvPicPr>
                 <p:cNvPr id="21" name="Ink 20">
@@ -7869,8 +7874,8 @@
           </mc:Fallback>
         </mc:AlternateContent>
       </p:grpSp>
-      <mc:AlternateContent xmlns:mc="http://schemas.openxmlformats.org/markup-compatibility/2006">
-        <mc:Choice xmlns:p14="http://schemas.microsoft.com/office/powerpoint/2010/main" Requires="p14">
+      <mc:AlternateContent xmlns:mc="http://schemas.openxmlformats.org/markup-compatibility/2006" xmlns:p14="http://schemas.microsoft.com/office/powerpoint/2010/main">
+        <mc:Choice Requires="p14">
           <p:contentPart p14:bwMode="auto" r:id="rId34">
             <p14:nvContentPartPr>
               <p14:cNvPr id="24" name="Ink 23">
@@ -7889,7 +7894,7 @@
             </p14:xfrm>
           </p:contentPart>
         </mc:Choice>
-        <mc:Fallback>
+        <mc:Fallback xmlns="">
           <p:pic>
             <p:nvPicPr>
               <p:cNvPr id="24" name="Ink 23">
@@ -7940,8 +7945,8 @@
             <a:chExt cx="1444320" cy="2052720"/>
           </a:xfrm>
         </p:grpSpPr>
-        <mc:AlternateContent xmlns:mc="http://schemas.openxmlformats.org/markup-compatibility/2006">
-          <mc:Choice xmlns:p14="http://schemas.microsoft.com/office/powerpoint/2010/main" Requires="p14">
+        <mc:AlternateContent xmlns:mc="http://schemas.openxmlformats.org/markup-compatibility/2006" xmlns:p14="http://schemas.microsoft.com/office/powerpoint/2010/main">
+          <mc:Choice Requires="p14">
             <p:contentPart p14:bwMode="auto" r:id="rId36">
               <p14:nvContentPartPr>
                 <p14:cNvPr id="22" name="Ink 21">
@@ -7960,7 +7965,7 @@
               </p14:xfrm>
             </p:contentPart>
           </mc:Choice>
-          <mc:Fallback>
+          <mc:Fallback xmlns="">
             <p:pic>
               <p:nvPicPr>
                 <p:cNvPr id="22" name="Ink 21">
@@ -7991,8 +7996,8 @@
             </p:pic>
           </mc:Fallback>
         </mc:AlternateContent>
-        <mc:AlternateContent xmlns:mc="http://schemas.openxmlformats.org/markup-compatibility/2006">
-          <mc:Choice xmlns:p14="http://schemas.microsoft.com/office/powerpoint/2010/main" Requires="p14">
+        <mc:AlternateContent xmlns:mc="http://schemas.openxmlformats.org/markup-compatibility/2006" xmlns:p14="http://schemas.microsoft.com/office/powerpoint/2010/main">
+          <mc:Choice Requires="p14">
             <p:contentPart p14:bwMode="auto" r:id="rId38">
               <p14:nvContentPartPr>
                 <p14:cNvPr id="25" name="Ink 24">
@@ -8011,7 +8016,7 @@
               </p14:xfrm>
             </p:contentPart>
           </mc:Choice>
-          <mc:Fallback>
+          <mc:Fallback xmlns="">
             <p:pic>
               <p:nvPicPr>
                 <p:cNvPr id="25" name="Ink 24">
@@ -8042,8 +8047,8 @@
             </p:pic>
           </mc:Fallback>
         </mc:AlternateContent>
-        <mc:AlternateContent xmlns:mc="http://schemas.openxmlformats.org/markup-compatibility/2006">
-          <mc:Choice xmlns:p14="http://schemas.microsoft.com/office/powerpoint/2010/main" Requires="p14">
+        <mc:AlternateContent xmlns:mc="http://schemas.openxmlformats.org/markup-compatibility/2006" xmlns:p14="http://schemas.microsoft.com/office/powerpoint/2010/main">
+          <mc:Choice Requires="p14">
             <p:contentPart p14:bwMode="auto" r:id="rId40">
               <p14:nvContentPartPr>
                 <p14:cNvPr id="26" name="Ink 25">
@@ -8062,7 +8067,7 @@
               </p14:xfrm>
             </p:contentPart>
           </mc:Choice>
-          <mc:Fallback>
+          <mc:Fallback xmlns="">
             <p:pic>
               <p:nvPicPr>
                 <p:cNvPr id="26" name="Ink 25">
@@ -8094,8 +8099,8 @@
           </mc:Fallback>
         </mc:AlternateContent>
       </p:grpSp>
-      <mc:AlternateContent xmlns:mc="http://schemas.openxmlformats.org/markup-compatibility/2006">
-        <mc:Choice xmlns:p14="http://schemas.microsoft.com/office/powerpoint/2010/main" Requires="p14">
+      <mc:AlternateContent xmlns:mc="http://schemas.openxmlformats.org/markup-compatibility/2006" xmlns:p14="http://schemas.microsoft.com/office/powerpoint/2010/main">
+        <mc:Choice Requires="p14">
           <p:contentPart p14:bwMode="auto" r:id="rId42">
             <p14:nvContentPartPr>
               <p14:cNvPr id="29" name="Ink 28">
@@ -8114,7 +8119,7 @@
             </p14:xfrm>
           </p:contentPart>
         </mc:Choice>
-        <mc:Fallback>
+        <mc:Fallback xmlns="">
           <p:pic>
             <p:nvPicPr>
               <p:cNvPr id="29" name="Ink 28">
@@ -8145,8 +8150,8 @@
           </p:pic>
         </mc:Fallback>
       </mc:AlternateContent>
-      <mc:AlternateContent xmlns:mc="http://schemas.openxmlformats.org/markup-compatibility/2006">
-        <mc:Choice xmlns:p14="http://schemas.microsoft.com/office/powerpoint/2010/main" Requires="p14">
+      <mc:AlternateContent xmlns:mc="http://schemas.openxmlformats.org/markup-compatibility/2006" xmlns:p14="http://schemas.microsoft.com/office/powerpoint/2010/main">
+        <mc:Choice Requires="p14">
           <p:contentPart p14:bwMode="auto" r:id="rId44">
             <p14:nvContentPartPr>
               <p14:cNvPr id="31" name="Ink 30">
@@ -8165,7 +8170,7 @@
             </p14:xfrm>
           </p:contentPart>
         </mc:Choice>
-        <mc:Fallback>
+        <mc:Fallback xmlns="">
           <p:pic>
             <p:nvPicPr>
               <p:cNvPr id="31" name="Ink 30">
@@ -8196,8 +8201,8 @@
           </p:pic>
         </mc:Fallback>
       </mc:AlternateContent>
-      <mc:AlternateContent xmlns:mc="http://schemas.openxmlformats.org/markup-compatibility/2006">
-        <mc:Choice xmlns:p14="http://schemas.microsoft.com/office/powerpoint/2010/main" Requires="p14">
+      <mc:AlternateContent xmlns:mc="http://schemas.openxmlformats.org/markup-compatibility/2006" xmlns:p14="http://schemas.microsoft.com/office/powerpoint/2010/main">
+        <mc:Choice Requires="p14">
           <p:contentPart p14:bwMode="auto" r:id="rId46">
             <p14:nvContentPartPr>
               <p14:cNvPr id="32" name="Ink 31">
@@ -8216,7 +8221,7 @@
             </p14:xfrm>
           </p:contentPart>
         </mc:Choice>
-        <mc:Fallback>
+        <mc:Fallback xmlns="">
           <p:pic>
             <p:nvPicPr>
               <p:cNvPr id="32" name="Ink 31">
@@ -8267,8 +8272,8 @@
             <a:chExt cx="1921320" cy="595080"/>
           </a:xfrm>
         </p:grpSpPr>
-        <mc:AlternateContent xmlns:mc="http://schemas.openxmlformats.org/markup-compatibility/2006">
-          <mc:Choice xmlns:p14="http://schemas.microsoft.com/office/powerpoint/2010/main" Requires="p14">
+        <mc:AlternateContent xmlns:mc="http://schemas.openxmlformats.org/markup-compatibility/2006" xmlns:p14="http://schemas.microsoft.com/office/powerpoint/2010/main">
+          <mc:Choice Requires="p14">
             <p:contentPart p14:bwMode="auto" r:id="rId48">
               <p14:nvContentPartPr>
                 <p14:cNvPr id="33" name="Ink 32">
@@ -8287,7 +8292,7 @@
               </p14:xfrm>
             </p:contentPart>
           </mc:Choice>
-          <mc:Fallback>
+          <mc:Fallback xmlns="">
             <p:pic>
               <p:nvPicPr>
                 <p:cNvPr id="33" name="Ink 32">
@@ -8318,8 +8323,8 @@
             </p:pic>
           </mc:Fallback>
         </mc:AlternateContent>
-        <mc:AlternateContent xmlns:mc="http://schemas.openxmlformats.org/markup-compatibility/2006">
-          <mc:Choice xmlns:p14="http://schemas.microsoft.com/office/powerpoint/2010/main" Requires="p14">
+        <mc:AlternateContent xmlns:mc="http://schemas.openxmlformats.org/markup-compatibility/2006" xmlns:p14="http://schemas.microsoft.com/office/powerpoint/2010/main">
+          <mc:Choice Requires="p14">
             <p:contentPart p14:bwMode="auto" r:id="rId50">
               <p14:nvContentPartPr>
                 <p14:cNvPr id="34" name="Ink 33">
@@ -8338,7 +8343,7 @@
               </p14:xfrm>
             </p:contentPart>
           </mc:Choice>
-          <mc:Fallback>
+          <mc:Fallback xmlns="">
             <p:pic>
               <p:nvPicPr>
                 <p:cNvPr id="34" name="Ink 33">
@@ -8369,8 +8374,8 @@
             </p:pic>
           </mc:Fallback>
         </mc:AlternateContent>
-        <mc:AlternateContent xmlns:mc="http://schemas.openxmlformats.org/markup-compatibility/2006">
-          <mc:Choice xmlns:p14="http://schemas.microsoft.com/office/powerpoint/2010/main" Requires="p14">
+        <mc:AlternateContent xmlns:mc="http://schemas.openxmlformats.org/markup-compatibility/2006" xmlns:p14="http://schemas.microsoft.com/office/powerpoint/2010/main">
+          <mc:Choice Requires="p14">
             <p:contentPart p14:bwMode="auto" r:id="rId52">
               <p14:nvContentPartPr>
                 <p14:cNvPr id="35" name="Ink 34">
@@ -8389,7 +8394,7 @@
               </p14:xfrm>
             </p:contentPart>
           </mc:Choice>
-          <mc:Fallback>
+          <mc:Fallback xmlns="">
             <p:pic>
               <p:nvPicPr>
                 <p:cNvPr id="35" name="Ink 34">
@@ -8420,8 +8425,8 @@
             </p:pic>
           </mc:Fallback>
         </mc:AlternateContent>
-        <mc:AlternateContent xmlns:mc="http://schemas.openxmlformats.org/markup-compatibility/2006">
-          <mc:Choice xmlns:p14="http://schemas.microsoft.com/office/powerpoint/2010/main" Requires="p14">
+        <mc:AlternateContent xmlns:mc="http://schemas.openxmlformats.org/markup-compatibility/2006" xmlns:p14="http://schemas.microsoft.com/office/powerpoint/2010/main">
+          <mc:Choice Requires="p14">
             <p:contentPart p14:bwMode="auto" r:id="rId54">
               <p14:nvContentPartPr>
                 <p14:cNvPr id="36" name="Ink 35">
@@ -8440,7 +8445,7 @@
               </p14:xfrm>
             </p:contentPart>
           </mc:Choice>
-          <mc:Fallback>
+          <mc:Fallback xmlns="">
             <p:pic>
               <p:nvPicPr>
                 <p:cNvPr id="36" name="Ink 35">
@@ -8471,8 +8476,8 @@
             </p:pic>
           </mc:Fallback>
         </mc:AlternateContent>
-        <mc:AlternateContent xmlns:mc="http://schemas.openxmlformats.org/markup-compatibility/2006">
-          <mc:Choice xmlns:p14="http://schemas.microsoft.com/office/powerpoint/2010/main" Requires="p14">
+        <mc:AlternateContent xmlns:mc="http://schemas.openxmlformats.org/markup-compatibility/2006" xmlns:p14="http://schemas.microsoft.com/office/powerpoint/2010/main">
+          <mc:Choice Requires="p14">
             <p:contentPart p14:bwMode="auto" r:id="rId56">
               <p14:nvContentPartPr>
                 <p14:cNvPr id="37" name="Ink 36">
@@ -8491,7 +8496,7 @@
               </p14:xfrm>
             </p:contentPart>
           </mc:Choice>
-          <mc:Fallback>
+          <mc:Fallback xmlns="">
             <p:pic>
               <p:nvPicPr>
                 <p:cNvPr id="37" name="Ink 36">
@@ -8522,8 +8527,8 @@
             </p:pic>
           </mc:Fallback>
         </mc:AlternateContent>
-        <mc:AlternateContent xmlns:mc="http://schemas.openxmlformats.org/markup-compatibility/2006">
-          <mc:Choice xmlns:p14="http://schemas.microsoft.com/office/powerpoint/2010/main" Requires="p14">
+        <mc:AlternateContent xmlns:mc="http://schemas.openxmlformats.org/markup-compatibility/2006" xmlns:p14="http://schemas.microsoft.com/office/powerpoint/2010/main">
+          <mc:Choice Requires="p14">
             <p:contentPart p14:bwMode="auto" r:id="rId58">
               <p14:nvContentPartPr>
                 <p14:cNvPr id="38" name="Ink 37">
@@ -8542,7 +8547,7 @@
               </p14:xfrm>
             </p:contentPart>
           </mc:Choice>
-          <mc:Fallback>
+          <mc:Fallback xmlns="">
             <p:pic>
               <p:nvPicPr>
                 <p:cNvPr id="38" name="Ink 37">
@@ -8574,8 +8579,8 @@
           </mc:Fallback>
         </mc:AlternateContent>
       </p:grpSp>
-      <mc:AlternateContent xmlns:mc="http://schemas.openxmlformats.org/markup-compatibility/2006">
-        <mc:Choice xmlns:p14="http://schemas.microsoft.com/office/powerpoint/2010/main" Requires="p14">
+      <mc:AlternateContent xmlns:mc="http://schemas.openxmlformats.org/markup-compatibility/2006" xmlns:p14="http://schemas.microsoft.com/office/powerpoint/2010/main">
+        <mc:Choice Requires="p14">
           <p:contentPart p14:bwMode="auto" r:id="rId60">
             <p14:nvContentPartPr>
               <p14:cNvPr id="40" name="Ink 39">
@@ -8594,7 +8599,7 @@
             </p14:xfrm>
           </p:contentPart>
         </mc:Choice>
-        <mc:Fallback>
+        <mc:Fallback xmlns="">
           <p:pic>
             <p:nvPicPr>
               <p:cNvPr id="40" name="Ink 39">
@@ -8625,8 +8630,8 @@
           </p:pic>
         </mc:Fallback>
       </mc:AlternateContent>
-      <mc:AlternateContent xmlns:mc="http://schemas.openxmlformats.org/markup-compatibility/2006">
-        <mc:Choice xmlns:p14="http://schemas.microsoft.com/office/powerpoint/2010/main" Requires="p14">
+      <mc:AlternateContent xmlns:mc="http://schemas.openxmlformats.org/markup-compatibility/2006" xmlns:p14="http://schemas.microsoft.com/office/powerpoint/2010/main">
+        <mc:Choice Requires="p14">
           <p:contentPart p14:bwMode="auto" r:id="rId62">
             <p14:nvContentPartPr>
               <p14:cNvPr id="41" name="Ink 40">
@@ -8645,7 +8650,7 @@
             </p14:xfrm>
           </p:contentPart>
         </mc:Choice>
-        <mc:Fallback>
+        <mc:Fallback xmlns="">
           <p:pic>
             <p:nvPicPr>
               <p:cNvPr id="41" name="Ink 40">
@@ -8696,8 +8701,8 @@
             <a:chExt cx="1585800" cy="554760"/>
           </a:xfrm>
         </p:grpSpPr>
-        <mc:AlternateContent xmlns:mc="http://schemas.openxmlformats.org/markup-compatibility/2006">
-          <mc:Choice xmlns:p14="http://schemas.microsoft.com/office/powerpoint/2010/main" Requires="p14">
+        <mc:AlternateContent xmlns:mc="http://schemas.openxmlformats.org/markup-compatibility/2006" xmlns:p14="http://schemas.microsoft.com/office/powerpoint/2010/main">
+          <mc:Choice Requires="p14">
             <p:contentPart p14:bwMode="auto" r:id="rId64">
               <p14:nvContentPartPr>
                 <p14:cNvPr id="42" name="Ink 41">
@@ -8716,7 +8721,7 @@
               </p14:xfrm>
             </p:contentPart>
           </mc:Choice>
-          <mc:Fallback>
+          <mc:Fallback xmlns="">
             <p:pic>
               <p:nvPicPr>
                 <p:cNvPr id="42" name="Ink 41">
@@ -8747,8 +8752,8 @@
             </p:pic>
           </mc:Fallback>
         </mc:AlternateContent>
-        <mc:AlternateContent xmlns:mc="http://schemas.openxmlformats.org/markup-compatibility/2006">
-          <mc:Choice xmlns:p14="http://schemas.microsoft.com/office/powerpoint/2010/main" Requires="p14">
+        <mc:AlternateContent xmlns:mc="http://schemas.openxmlformats.org/markup-compatibility/2006" xmlns:p14="http://schemas.microsoft.com/office/powerpoint/2010/main">
+          <mc:Choice Requires="p14">
             <p:contentPart p14:bwMode="auto" r:id="rId66">
               <p14:nvContentPartPr>
                 <p14:cNvPr id="43" name="Ink 42">
@@ -8767,7 +8772,7 @@
               </p14:xfrm>
             </p:contentPart>
           </mc:Choice>
-          <mc:Fallback>
+          <mc:Fallback xmlns="">
             <p:pic>
               <p:nvPicPr>
                 <p:cNvPr id="43" name="Ink 42">
@@ -8798,8 +8803,8 @@
             </p:pic>
           </mc:Fallback>
         </mc:AlternateContent>
-        <mc:AlternateContent xmlns:mc="http://schemas.openxmlformats.org/markup-compatibility/2006">
-          <mc:Choice xmlns:p14="http://schemas.microsoft.com/office/powerpoint/2010/main" Requires="p14">
+        <mc:AlternateContent xmlns:mc="http://schemas.openxmlformats.org/markup-compatibility/2006" xmlns:p14="http://schemas.microsoft.com/office/powerpoint/2010/main">
+          <mc:Choice Requires="p14">
             <p:contentPart p14:bwMode="auto" r:id="rId68">
               <p14:nvContentPartPr>
                 <p14:cNvPr id="44" name="Ink 43">
@@ -8818,7 +8823,7 @@
               </p14:xfrm>
             </p:contentPart>
           </mc:Choice>
-          <mc:Fallback>
+          <mc:Fallback xmlns="">
             <p:pic>
               <p:nvPicPr>
                 <p:cNvPr id="44" name="Ink 43">
@@ -8849,8 +8854,8 @@
             </p:pic>
           </mc:Fallback>
         </mc:AlternateContent>
-        <mc:AlternateContent xmlns:mc="http://schemas.openxmlformats.org/markup-compatibility/2006">
-          <mc:Choice xmlns:p14="http://schemas.microsoft.com/office/powerpoint/2010/main" Requires="p14">
+        <mc:AlternateContent xmlns:mc="http://schemas.openxmlformats.org/markup-compatibility/2006" xmlns:p14="http://schemas.microsoft.com/office/powerpoint/2010/main">
+          <mc:Choice Requires="p14">
             <p:contentPart p14:bwMode="auto" r:id="rId70">
               <p14:nvContentPartPr>
                 <p14:cNvPr id="45" name="Ink 44">
@@ -8869,7 +8874,7 @@
               </p14:xfrm>
             </p:contentPart>
           </mc:Choice>
-          <mc:Fallback>
+          <mc:Fallback xmlns="">
             <p:pic>
               <p:nvPicPr>
                 <p:cNvPr id="45" name="Ink 44">
@@ -8900,8 +8905,8 @@
             </p:pic>
           </mc:Fallback>
         </mc:AlternateContent>
-        <mc:AlternateContent xmlns:mc="http://schemas.openxmlformats.org/markup-compatibility/2006">
-          <mc:Choice xmlns:p14="http://schemas.microsoft.com/office/powerpoint/2010/main" Requires="p14">
+        <mc:AlternateContent xmlns:mc="http://schemas.openxmlformats.org/markup-compatibility/2006" xmlns:p14="http://schemas.microsoft.com/office/powerpoint/2010/main">
+          <mc:Choice Requires="p14">
             <p:contentPart p14:bwMode="auto" r:id="rId72">
               <p14:nvContentPartPr>
                 <p14:cNvPr id="46" name="Ink 45">
@@ -8920,7 +8925,7 @@
               </p14:xfrm>
             </p:contentPart>
           </mc:Choice>
-          <mc:Fallback>
+          <mc:Fallback xmlns="">
             <p:pic>
               <p:nvPicPr>
                 <p:cNvPr id="46" name="Ink 45">
@@ -8972,8 +8977,8 @@
             <a:chExt cx="4080240" cy="977400"/>
           </a:xfrm>
         </p:grpSpPr>
-        <mc:AlternateContent xmlns:mc="http://schemas.openxmlformats.org/markup-compatibility/2006">
-          <mc:Choice xmlns:p14="http://schemas.microsoft.com/office/powerpoint/2010/main" Requires="p14">
+        <mc:AlternateContent xmlns:mc="http://schemas.openxmlformats.org/markup-compatibility/2006" xmlns:p14="http://schemas.microsoft.com/office/powerpoint/2010/main">
+          <mc:Choice Requires="p14">
             <p:contentPart p14:bwMode="auto" r:id="rId74">
               <p14:nvContentPartPr>
                 <p14:cNvPr id="47" name="Ink 46">
@@ -8992,7 +8997,7 @@
               </p14:xfrm>
             </p:contentPart>
           </mc:Choice>
-          <mc:Fallback>
+          <mc:Fallback xmlns="">
             <p:pic>
               <p:nvPicPr>
                 <p:cNvPr id="47" name="Ink 46">
@@ -9023,8 +9028,8 @@
             </p:pic>
           </mc:Fallback>
         </mc:AlternateContent>
-        <mc:AlternateContent xmlns:mc="http://schemas.openxmlformats.org/markup-compatibility/2006">
-          <mc:Choice xmlns:p14="http://schemas.microsoft.com/office/powerpoint/2010/main" Requires="p14">
+        <mc:AlternateContent xmlns:mc="http://schemas.openxmlformats.org/markup-compatibility/2006" xmlns:p14="http://schemas.microsoft.com/office/powerpoint/2010/main">
+          <mc:Choice Requires="p14">
             <p:contentPart p14:bwMode="auto" r:id="rId76">
               <p14:nvContentPartPr>
                 <p14:cNvPr id="48" name="Ink 47">
@@ -9043,7 +9048,7 @@
               </p14:xfrm>
             </p:contentPart>
           </mc:Choice>
-          <mc:Fallback>
+          <mc:Fallback xmlns="">
             <p:pic>
               <p:nvPicPr>
                 <p:cNvPr id="48" name="Ink 47">
@@ -9074,8 +9079,8 @@
             </p:pic>
           </mc:Fallback>
         </mc:AlternateContent>
-        <mc:AlternateContent xmlns:mc="http://schemas.openxmlformats.org/markup-compatibility/2006">
-          <mc:Choice xmlns:p14="http://schemas.microsoft.com/office/powerpoint/2010/main" Requires="p14">
+        <mc:AlternateContent xmlns:mc="http://schemas.openxmlformats.org/markup-compatibility/2006" xmlns:p14="http://schemas.microsoft.com/office/powerpoint/2010/main">
+          <mc:Choice Requires="p14">
             <p:contentPart p14:bwMode="auto" r:id="rId78">
               <p14:nvContentPartPr>
                 <p14:cNvPr id="49" name="Ink 48">
@@ -9094,7 +9099,7 @@
               </p14:xfrm>
             </p:contentPart>
           </mc:Choice>
-          <mc:Fallback>
+          <mc:Fallback xmlns="">
             <p:pic>
               <p:nvPicPr>
                 <p:cNvPr id="49" name="Ink 48">
@@ -9125,8 +9130,8 @@
             </p:pic>
           </mc:Fallback>
         </mc:AlternateContent>
-        <mc:AlternateContent xmlns:mc="http://schemas.openxmlformats.org/markup-compatibility/2006">
-          <mc:Choice xmlns:p14="http://schemas.microsoft.com/office/powerpoint/2010/main" Requires="p14">
+        <mc:AlternateContent xmlns:mc="http://schemas.openxmlformats.org/markup-compatibility/2006" xmlns:p14="http://schemas.microsoft.com/office/powerpoint/2010/main">
+          <mc:Choice Requires="p14">
             <p:contentPart p14:bwMode="auto" r:id="rId80">
               <p14:nvContentPartPr>
                 <p14:cNvPr id="50" name="Ink 49">
@@ -9145,7 +9150,7 @@
               </p14:xfrm>
             </p:contentPart>
           </mc:Choice>
-          <mc:Fallback>
+          <mc:Fallback xmlns="">
             <p:pic>
               <p:nvPicPr>
                 <p:cNvPr id="50" name="Ink 49">
@@ -9176,8 +9181,8 @@
             </p:pic>
           </mc:Fallback>
         </mc:AlternateContent>
-        <mc:AlternateContent xmlns:mc="http://schemas.openxmlformats.org/markup-compatibility/2006">
-          <mc:Choice xmlns:p14="http://schemas.microsoft.com/office/powerpoint/2010/main" Requires="p14">
+        <mc:AlternateContent xmlns:mc="http://schemas.openxmlformats.org/markup-compatibility/2006" xmlns:p14="http://schemas.microsoft.com/office/powerpoint/2010/main">
+          <mc:Choice Requires="p14">
             <p:contentPart p14:bwMode="auto" r:id="rId82">
               <p14:nvContentPartPr>
                 <p14:cNvPr id="51" name="Ink 50">
@@ -9196,7 +9201,7 @@
               </p14:xfrm>
             </p:contentPart>
           </mc:Choice>
-          <mc:Fallback>
+          <mc:Fallback xmlns="">
             <p:pic>
               <p:nvPicPr>
                 <p:cNvPr id="51" name="Ink 50">
@@ -9227,8 +9232,8 @@
             </p:pic>
           </mc:Fallback>
         </mc:AlternateContent>
-        <mc:AlternateContent xmlns:mc="http://schemas.openxmlformats.org/markup-compatibility/2006">
-          <mc:Choice xmlns:p14="http://schemas.microsoft.com/office/powerpoint/2010/main" Requires="p14">
+        <mc:AlternateContent xmlns:mc="http://schemas.openxmlformats.org/markup-compatibility/2006" xmlns:p14="http://schemas.microsoft.com/office/powerpoint/2010/main">
+          <mc:Choice Requires="p14">
             <p:contentPart p14:bwMode="auto" r:id="rId84">
               <p14:nvContentPartPr>
                 <p14:cNvPr id="52" name="Ink 51">
@@ -9247,7 +9252,7 @@
               </p14:xfrm>
             </p:contentPart>
           </mc:Choice>
-          <mc:Fallback>
+          <mc:Fallback xmlns="">
             <p:pic>
               <p:nvPicPr>
                 <p:cNvPr id="52" name="Ink 51">
@@ -9278,8 +9283,8 @@
             </p:pic>
           </mc:Fallback>
         </mc:AlternateContent>
-        <mc:AlternateContent xmlns:mc="http://schemas.openxmlformats.org/markup-compatibility/2006">
-          <mc:Choice xmlns:p14="http://schemas.microsoft.com/office/powerpoint/2010/main" Requires="p14">
+        <mc:AlternateContent xmlns:mc="http://schemas.openxmlformats.org/markup-compatibility/2006" xmlns:p14="http://schemas.microsoft.com/office/powerpoint/2010/main">
+          <mc:Choice Requires="p14">
             <p:contentPart p14:bwMode="auto" r:id="rId86">
               <p14:nvContentPartPr>
                 <p14:cNvPr id="53" name="Ink 52">
@@ -9298,7 +9303,7 @@
               </p14:xfrm>
             </p:contentPart>
           </mc:Choice>
-          <mc:Fallback>
+          <mc:Fallback xmlns="">
             <p:pic>
               <p:nvPicPr>
                 <p:cNvPr id="53" name="Ink 52">
@@ -9329,8 +9334,8 @@
             </p:pic>
           </mc:Fallback>
         </mc:AlternateContent>
-        <mc:AlternateContent xmlns:mc="http://schemas.openxmlformats.org/markup-compatibility/2006">
-          <mc:Choice xmlns:p14="http://schemas.microsoft.com/office/powerpoint/2010/main" Requires="p14">
+        <mc:AlternateContent xmlns:mc="http://schemas.openxmlformats.org/markup-compatibility/2006" xmlns:p14="http://schemas.microsoft.com/office/powerpoint/2010/main">
+          <mc:Choice Requires="p14">
             <p:contentPart p14:bwMode="auto" r:id="rId88">
               <p14:nvContentPartPr>
                 <p14:cNvPr id="54" name="Ink 53">
@@ -9349,7 +9354,7 @@
               </p14:xfrm>
             </p:contentPart>
           </mc:Choice>
-          <mc:Fallback>
+          <mc:Fallback xmlns="">
             <p:pic>
               <p:nvPicPr>
                 <p:cNvPr id="54" name="Ink 53">
@@ -9380,8 +9385,8 @@
             </p:pic>
           </mc:Fallback>
         </mc:AlternateContent>
-        <mc:AlternateContent xmlns:mc="http://schemas.openxmlformats.org/markup-compatibility/2006">
-          <mc:Choice xmlns:p14="http://schemas.microsoft.com/office/powerpoint/2010/main" Requires="p14">
+        <mc:AlternateContent xmlns:mc="http://schemas.openxmlformats.org/markup-compatibility/2006" xmlns:p14="http://schemas.microsoft.com/office/powerpoint/2010/main">
+          <mc:Choice Requires="p14">
             <p:contentPart p14:bwMode="auto" r:id="rId90">
               <p14:nvContentPartPr>
                 <p14:cNvPr id="55" name="Ink 54">
@@ -9400,7 +9405,7 @@
               </p14:xfrm>
             </p:contentPart>
           </mc:Choice>
-          <mc:Fallback>
+          <mc:Fallback xmlns="">
             <p:pic>
               <p:nvPicPr>
                 <p:cNvPr id="55" name="Ink 54">
@@ -9452,8 +9457,8 @@
             <a:chExt cx="1051560" cy="791640"/>
           </a:xfrm>
         </p:grpSpPr>
-        <mc:AlternateContent xmlns:mc="http://schemas.openxmlformats.org/markup-compatibility/2006">
-          <mc:Choice xmlns:p14="http://schemas.microsoft.com/office/powerpoint/2010/main" Requires="p14">
+        <mc:AlternateContent xmlns:mc="http://schemas.openxmlformats.org/markup-compatibility/2006" xmlns:p14="http://schemas.microsoft.com/office/powerpoint/2010/main">
+          <mc:Choice Requires="p14">
             <p:contentPart p14:bwMode="auto" r:id="rId92">
               <p14:nvContentPartPr>
                 <p14:cNvPr id="62" name="Ink 61">
@@ -9472,7 +9477,7 @@
               </p14:xfrm>
             </p:contentPart>
           </mc:Choice>
-          <mc:Fallback>
+          <mc:Fallback xmlns="">
             <p:pic>
               <p:nvPicPr>
                 <p:cNvPr id="62" name="Ink 61">
@@ -9503,8 +9508,8 @@
             </p:pic>
           </mc:Fallback>
         </mc:AlternateContent>
-        <mc:AlternateContent xmlns:mc="http://schemas.openxmlformats.org/markup-compatibility/2006">
-          <mc:Choice xmlns:p14="http://schemas.microsoft.com/office/powerpoint/2010/main" Requires="p14">
+        <mc:AlternateContent xmlns:mc="http://schemas.openxmlformats.org/markup-compatibility/2006" xmlns:p14="http://schemas.microsoft.com/office/powerpoint/2010/main">
+          <mc:Choice Requires="p14">
             <p:contentPart p14:bwMode="auto" r:id="rId94">
               <p14:nvContentPartPr>
                 <p14:cNvPr id="63" name="Ink 62">
@@ -9523,7 +9528,7 @@
               </p14:xfrm>
             </p:contentPart>
           </mc:Choice>
-          <mc:Fallback>
+          <mc:Fallback xmlns="">
             <p:pic>
               <p:nvPicPr>
                 <p:cNvPr id="63" name="Ink 62">
@@ -9554,8 +9559,8 @@
             </p:pic>
           </mc:Fallback>
         </mc:AlternateContent>
-        <mc:AlternateContent xmlns:mc="http://schemas.openxmlformats.org/markup-compatibility/2006">
-          <mc:Choice xmlns:p14="http://schemas.microsoft.com/office/powerpoint/2010/main" Requires="p14">
+        <mc:AlternateContent xmlns:mc="http://schemas.openxmlformats.org/markup-compatibility/2006" xmlns:p14="http://schemas.microsoft.com/office/powerpoint/2010/main">
+          <mc:Choice Requires="p14">
             <p:contentPart p14:bwMode="auto" r:id="rId96">
               <p14:nvContentPartPr>
                 <p14:cNvPr id="64" name="Ink 63">
@@ -9574,7 +9579,7 @@
               </p14:xfrm>
             </p:contentPart>
           </mc:Choice>
-          <mc:Fallback>
+          <mc:Fallback xmlns="">
             <p:pic>
               <p:nvPicPr>
                 <p:cNvPr id="64" name="Ink 63">
@@ -9605,8 +9610,8 @@
             </p:pic>
           </mc:Fallback>
         </mc:AlternateContent>
-        <mc:AlternateContent xmlns:mc="http://schemas.openxmlformats.org/markup-compatibility/2006">
-          <mc:Choice xmlns:p14="http://schemas.microsoft.com/office/powerpoint/2010/main" Requires="p14">
+        <mc:AlternateContent xmlns:mc="http://schemas.openxmlformats.org/markup-compatibility/2006" xmlns:p14="http://schemas.microsoft.com/office/powerpoint/2010/main">
+          <mc:Choice Requires="p14">
             <p:contentPart p14:bwMode="auto" r:id="rId98">
               <p14:nvContentPartPr>
                 <p14:cNvPr id="65" name="Ink 64">
@@ -9625,7 +9630,7 @@
               </p14:xfrm>
             </p:contentPart>
           </mc:Choice>
-          <mc:Fallback>
+          <mc:Fallback xmlns="">
             <p:pic>
               <p:nvPicPr>
                 <p:cNvPr id="65" name="Ink 64">
@@ -9657,8 +9662,8 @@
           </mc:Fallback>
         </mc:AlternateContent>
       </p:grpSp>
-      <mc:AlternateContent xmlns:mc="http://schemas.openxmlformats.org/markup-compatibility/2006">
-        <mc:Choice xmlns:p14="http://schemas.microsoft.com/office/powerpoint/2010/main" Requires="p14">
+      <mc:AlternateContent xmlns:mc="http://schemas.openxmlformats.org/markup-compatibility/2006" xmlns:p14="http://schemas.microsoft.com/office/powerpoint/2010/main">
+        <mc:Choice Requires="p14">
           <p:contentPart p14:bwMode="auto" r:id="rId100">
             <p14:nvContentPartPr>
               <p14:cNvPr id="66" name="Ink 65">
@@ -9677,7 +9682,7 @@
             </p14:xfrm>
           </p:contentPart>
         </mc:Choice>
-        <mc:Fallback>
+        <mc:Fallback xmlns="">
           <p:pic>
             <p:nvPicPr>
               <p:cNvPr id="66" name="Ink 65">
@@ -9728,8 +9733,8 @@
             <a:chExt cx="3134160" cy="1140840"/>
           </a:xfrm>
         </p:grpSpPr>
-        <mc:AlternateContent xmlns:mc="http://schemas.openxmlformats.org/markup-compatibility/2006">
-          <mc:Choice xmlns:p14="http://schemas.microsoft.com/office/powerpoint/2010/main" Requires="p14">
+        <mc:AlternateContent xmlns:mc="http://schemas.openxmlformats.org/markup-compatibility/2006" xmlns:p14="http://schemas.microsoft.com/office/powerpoint/2010/main">
+          <mc:Choice Requires="p14">
             <p:contentPart p14:bwMode="auto" r:id="rId102">
               <p14:nvContentPartPr>
                 <p14:cNvPr id="58" name="Ink 57">
@@ -9748,7 +9753,7 @@
               </p14:xfrm>
             </p:contentPart>
           </mc:Choice>
-          <mc:Fallback>
+          <mc:Fallback xmlns="">
             <p:pic>
               <p:nvPicPr>
                 <p:cNvPr id="58" name="Ink 57">
@@ -9779,8 +9784,8 @@
             </p:pic>
           </mc:Fallback>
         </mc:AlternateContent>
-        <mc:AlternateContent xmlns:mc="http://schemas.openxmlformats.org/markup-compatibility/2006">
-          <mc:Choice xmlns:p14="http://schemas.microsoft.com/office/powerpoint/2010/main" Requires="p14">
+        <mc:AlternateContent xmlns:mc="http://schemas.openxmlformats.org/markup-compatibility/2006" xmlns:p14="http://schemas.microsoft.com/office/powerpoint/2010/main">
+          <mc:Choice Requires="p14">
             <p:contentPart p14:bwMode="auto" r:id="rId104">
               <p14:nvContentPartPr>
                 <p14:cNvPr id="60" name="Ink 59">
@@ -9799,7 +9804,7 @@
               </p14:xfrm>
             </p:contentPart>
           </mc:Choice>
-          <mc:Fallback>
+          <mc:Fallback xmlns="">
             <p:pic>
               <p:nvPicPr>
                 <p:cNvPr id="60" name="Ink 59">
@@ -9830,8 +9835,8 @@
             </p:pic>
           </mc:Fallback>
         </mc:AlternateContent>
-        <mc:AlternateContent xmlns:mc="http://schemas.openxmlformats.org/markup-compatibility/2006">
-          <mc:Choice xmlns:p14="http://schemas.microsoft.com/office/powerpoint/2010/main" Requires="p14">
+        <mc:AlternateContent xmlns:mc="http://schemas.openxmlformats.org/markup-compatibility/2006" xmlns:p14="http://schemas.microsoft.com/office/powerpoint/2010/main">
+          <mc:Choice Requires="p14">
             <p:contentPart p14:bwMode="auto" r:id="rId106">
               <p14:nvContentPartPr>
                 <p14:cNvPr id="67" name="Ink 66">
@@ -9850,7 +9855,7 @@
               </p14:xfrm>
             </p:contentPart>
           </mc:Choice>
-          <mc:Fallback>
+          <mc:Fallback xmlns="">
             <p:pic>
               <p:nvPicPr>
                 <p:cNvPr id="67" name="Ink 66">
@@ -9902,8 +9907,8 @@
             <a:chExt cx="1412640" cy="2645640"/>
           </a:xfrm>
         </p:grpSpPr>
-        <mc:AlternateContent xmlns:mc="http://schemas.openxmlformats.org/markup-compatibility/2006">
-          <mc:Choice xmlns:p14="http://schemas.microsoft.com/office/powerpoint/2010/main" Requires="p14">
+        <mc:AlternateContent xmlns:mc="http://schemas.openxmlformats.org/markup-compatibility/2006" xmlns:p14="http://schemas.microsoft.com/office/powerpoint/2010/main">
+          <mc:Choice Requires="p14">
             <p:contentPart p14:bwMode="auto" r:id="rId108">
               <p14:nvContentPartPr>
                 <p14:cNvPr id="59" name="Ink 58">
@@ -9922,7 +9927,7 @@
               </p14:xfrm>
             </p:contentPart>
           </mc:Choice>
-          <mc:Fallback>
+          <mc:Fallback xmlns="">
             <p:pic>
               <p:nvPicPr>
                 <p:cNvPr id="59" name="Ink 58">
@@ -9953,8 +9958,8 @@
             </p:pic>
           </mc:Fallback>
         </mc:AlternateContent>
-        <mc:AlternateContent xmlns:mc="http://schemas.openxmlformats.org/markup-compatibility/2006">
-          <mc:Choice xmlns:p14="http://schemas.microsoft.com/office/powerpoint/2010/main" Requires="p14">
+        <mc:AlternateContent xmlns:mc="http://schemas.openxmlformats.org/markup-compatibility/2006" xmlns:p14="http://schemas.microsoft.com/office/powerpoint/2010/main">
+          <mc:Choice Requires="p14">
             <p:contentPart p14:bwMode="auto" r:id="rId110">
               <p14:nvContentPartPr>
                 <p14:cNvPr id="61" name="Ink 60">
@@ -9973,7 +9978,7 @@
               </p14:xfrm>
             </p:contentPart>
           </mc:Choice>
-          <mc:Fallback>
+          <mc:Fallback xmlns="">
             <p:pic>
               <p:nvPicPr>
                 <p:cNvPr id="61" name="Ink 60">
@@ -10004,8 +10009,8 @@
             </p:pic>
           </mc:Fallback>
         </mc:AlternateContent>
-        <mc:AlternateContent xmlns:mc="http://schemas.openxmlformats.org/markup-compatibility/2006">
-          <mc:Choice xmlns:p14="http://schemas.microsoft.com/office/powerpoint/2010/main" Requires="p14">
+        <mc:AlternateContent xmlns:mc="http://schemas.openxmlformats.org/markup-compatibility/2006" xmlns:p14="http://schemas.microsoft.com/office/powerpoint/2010/main">
+          <mc:Choice Requires="p14">
             <p:contentPart p14:bwMode="auto" r:id="rId112">
               <p14:nvContentPartPr>
                 <p14:cNvPr id="68" name="Ink 67">
@@ -10024,7 +10029,7 @@
               </p14:xfrm>
             </p:contentPart>
           </mc:Choice>
-          <mc:Fallback>
+          <mc:Fallback xmlns="">
             <p:pic>
               <p:nvPicPr>
                 <p:cNvPr id="68" name="Ink 67">
@@ -10076,8 +10081,8 @@
             <a:chExt cx="7018200" cy="1031760"/>
           </a:xfrm>
         </p:grpSpPr>
-        <mc:AlternateContent xmlns:mc="http://schemas.openxmlformats.org/markup-compatibility/2006">
-          <mc:Choice xmlns:p14="http://schemas.microsoft.com/office/powerpoint/2010/main" Requires="p14">
+        <mc:AlternateContent xmlns:mc="http://schemas.openxmlformats.org/markup-compatibility/2006" xmlns:p14="http://schemas.microsoft.com/office/powerpoint/2010/main">
+          <mc:Choice Requires="p14">
             <p:contentPart p14:bwMode="auto" r:id="rId114">
               <p14:nvContentPartPr>
                 <p14:cNvPr id="69" name="Ink 68">
@@ -10096,7 +10101,7 @@
               </p14:xfrm>
             </p:contentPart>
           </mc:Choice>
-          <mc:Fallback>
+          <mc:Fallback xmlns="">
             <p:pic>
               <p:nvPicPr>
                 <p:cNvPr id="69" name="Ink 68">
@@ -10127,8 +10132,8 @@
             </p:pic>
           </mc:Fallback>
         </mc:AlternateContent>
-        <mc:AlternateContent xmlns:mc="http://schemas.openxmlformats.org/markup-compatibility/2006">
-          <mc:Choice xmlns:p14="http://schemas.microsoft.com/office/powerpoint/2010/main" Requires="p14">
+        <mc:AlternateContent xmlns:mc="http://schemas.openxmlformats.org/markup-compatibility/2006" xmlns:p14="http://schemas.microsoft.com/office/powerpoint/2010/main">
+          <mc:Choice Requires="p14">
             <p:contentPart p14:bwMode="auto" r:id="rId116">
               <p14:nvContentPartPr>
                 <p14:cNvPr id="70" name="Ink 69">
@@ -10147,7 +10152,7 @@
               </p14:xfrm>
             </p:contentPart>
           </mc:Choice>
-          <mc:Fallback>
+          <mc:Fallback xmlns="">
             <p:pic>
               <p:nvPicPr>
                 <p:cNvPr id="70" name="Ink 69">
@@ -10178,8 +10183,8 @@
             </p:pic>
           </mc:Fallback>
         </mc:AlternateContent>
-        <mc:AlternateContent xmlns:mc="http://schemas.openxmlformats.org/markup-compatibility/2006">
-          <mc:Choice xmlns:p14="http://schemas.microsoft.com/office/powerpoint/2010/main" Requires="p14">
+        <mc:AlternateContent xmlns:mc="http://schemas.openxmlformats.org/markup-compatibility/2006" xmlns:p14="http://schemas.microsoft.com/office/powerpoint/2010/main">
+          <mc:Choice Requires="p14">
             <p:contentPart p14:bwMode="auto" r:id="rId118">
               <p14:nvContentPartPr>
                 <p14:cNvPr id="71" name="Ink 70">
@@ -10198,7 +10203,7 @@
               </p14:xfrm>
             </p:contentPart>
           </mc:Choice>
-          <mc:Fallback>
+          <mc:Fallback xmlns="">
             <p:pic>
               <p:nvPicPr>
                 <p:cNvPr id="71" name="Ink 70">
@@ -10229,8 +10234,8 @@
             </p:pic>
           </mc:Fallback>
         </mc:AlternateContent>
-        <mc:AlternateContent xmlns:mc="http://schemas.openxmlformats.org/markup-compatibility/2006">
-          <mc:Choice xmlns:p14="http://schemas.microsoft.com/office/powerpoint/2010/main" Requires="p14">
+        <mc:AlternateContent xmlns:mc="http://schemas.openxmlformats.org/markup-compatibility/2006" xmlns:p14="http://schemas.microsoft.com/office/powerpoint/2010/main">
+          <mc:Choice Requires="p14">
             <p:contentPart p14:bwMode="auto" r:id="rId120">
               <p14:nvContentPartPr>
                 <p14:cNvPr id="72" name="Ink 71">
@@ -10249,7 +10254,7 @@
               </p14:xfrm>
             </p:contentPart>
           </mc:Choice>
-          <mc:Fallback>
+          <mc:Fallback xmlns="">
             <p:pic>
               <p:nvPicPr>
                 <p:cNvPr id="72" name="Ink 71">
@@ -10280,8 +10285,8 @@
             </p:pic>
           </mc:Fallback>
         </mc:AlternateContent>
-        <mc:AlternateContent xmlns:mc="http://schemas.openxmlformats.org/markup-compatibility/2006">
-          <mc:Choice xmlns:p14="http://schemas.microsoft.com/office/powerpoint/2010/main" Requires="p14">
+        <mc:AlternateContent xmlns:mc="http://schemas.openxmlformats.org/markup-compatibility/2006" xmlns:p14="http://schemas.microsoft.com/office/powerpoint/2010/main">
+          <mc:Choice Requires="p14">
             <p:contentPart p14:bwMode="auto" r:id="rId122">
               <p14:nvContentPartPr>
                 <p14:cNvPr id="73" name="Ink 72">
@@ -10300,7 +10305,7 @@
               </p14:xfrm>
             </p:contentPart>
           </mc:Choice>
-          <mc:Fallback>
+          <mc:Fallback xmlns="">
             <p:pic>
               <p:nvPicPr>
                 <p:cNvPr id="73" name="Ink 72">
@@ -10331,8 +10336,8 @@
             </p:pic>
           </mc:Fallback>
         </mc:AlternateContent>
-        <mc:AlternateContent xmlns:mc="http://schemas.openxmlformats.org/markup-compatibility/2006">
-          <mc:Choice xmlns:p14="http://schemas.microsoft.com/office/powerpoint/2010/main" Requires="p14">
+        <mc:AlternateContent xmlns:mc="http://schemas.openxmlformats.org/markup-compatibility/2006" xmlns:p14="http://schemas.microsoft.com/office/powerpoint/2010/main">
+          <mc:Choice Requires="p14">
             <p:contentPart p14:bwMode="auto" r:id="rId124">
               <p14:nvContentPartPr>
                 <p14:cNvPr id="74" name="Ink 73">
@@ -10351,7 +10356,7 @@
               </p14:xfrm>
             </p:contentPart>
           </mc:Choice>
-          <mc:Fallback>
+          <mc:Fallback xmlns="">
             <p:pic>
               <p:nvPicPr>
                 <p:cNvPr id="74" name="Ink 73">
@@ -10382,8 +10387,8 @@
             </p:pic>
           </mc:Fallback>
         </mc:AlternateContent>
-        <mc:AlternateContent xmlns:mc="http://schemas.openxmlformats.org/markup-compatibility/2006">
-          <mc:Choice xmlns:p14="http://schemas.microsoft.com/office/powerpoint/2010/main" Requires="p14">
+        <mc:AlternateContent xmlns:mc="http://schemas.openxmlformats.org/markup-compatibility/2006" xmlns:p14="http://schemas.microsoft.com/office/powerpoint/2010/main">
+          <mc:Choice Requires="p14">
             <p:contentPart p14:bwMode="auto" r:id="rId126">
               <p14:nvContentPartPr>
                 <p14:cNvPr id="75" name="Ink 74">
@@ -10402,7 +10407,7 @@
               </p14:xfrm>
             </p:contentPart>
           </mc:Choice>
-          <mc:Fallback>
+          <mc:Fallback xmlns="">
             <p:pic>
               <p:nvPicPr>
                 <p:cNvPr id="75" name="Ink 74">
@@ -10433,8 +10438,8 @@
             </p:pic>
           </mc:Fallback>
         </mc:AlternateContent>
-        <mc:AlternateContent xmlns:mc="http://schemas.openxmlformats.org/markup-compatibility/2006">
-          <mc:Choice xmlns:p14="http://schemas.microsoft.com/office/powerpoint/2010/main" Requires="p14">
+        <mc:AlternateContent xmlns:mc="http://schemas.openxmlformats.org/markup-compatibility/2006" xmlns:p14="http://schemas.microsoft.com/office/powerpoint/2010/main">
+          <mc:Choice Requires="p14">
             <p:contentPart p14:bwMode="auto" r:id="rId128">
               <p14:nvContentPartPr>
                 <p14:cNvPr id="76" name="Ink 75">
@@ -10453,7 +10458,7 @@
               </p14:xfrm>
             </p:contentPart>
           </mc:Choice>
-          <mc:Fallback>
+          <mc:Fallback xmlns="">
             <p:pic>
               <p:nvPicPr>
                 <p:cNvPr id="76" name="Ink 75">
@@ -10484,8 +10489,8 @@
             </p:pic>
           </mc:Fallback>
         </mc:AlternateContent>
-        <mc:AlternateContent xmlns:mc="http://schemas.openxmlformats.org/markup-compatibility/2006">
-          <mc:Choice xmlns:p14="http://schemas.microsoft.com/office/powerpoint/2010/main" Requires="p14">
+        <mc:AlternateContent xmlns:mc="http://schemas.openxmlformats.org/markup-compatibility/2006" xmlns:p14="http://schemas.microsoft.com/office/powerpoint/2010/main">
+          <mc:Choice Requires="p14">
             <p:contentPart p14:bwMode="auto" r:id="rId130">
               <p14:nvContentPartPr>
                 <p14:cNvPr id="77" name="Ink 76">
@@ -10504,7 +10509,7 @@
               </p14:xfrm>
             </p:contentPart>
           </mc:Choice>
-          <mc:Fallback>
+          <mc:Fallback xmlns="">
             <p:pic>
               <p:nvPicPr>
                 <p:cNvPr id="77" name="Ink 76">
@@ -10535,8 +10540,8 @@
             </p:pic>
           </mc:Fallback>
         </mc:AlternateContent>
-        <mc:AlternateContent xmlns:mc="http://schemas.openxmlformats.org/markup-compatibility/2006">
-          <mc:Choice xmlns:p14="http://schemas.microsoft.com/office/powerpoint/2010/main" Requires="p14">
+        <mc:AlternateContent xmlns:mc="http://schemas.openxmlformats.org/markup-compatibility/2006" xmlns:p14="http://schemas.microsoft.com/office/powerpoint/2010/main">
+          <mc:Choice Requires="p14">
             <p:contentPart p14:bwMode="auto" r:id="rId132">
               <p14:nvContentPartPr>
                 <p14:cNvPr id="78" name="Ink 77">
@@ -10555,7 +10560,7 @@
               </p14:xfrm>
             </p:contentPart>
           </mc:Choice>
-          <mc:Fallback>
+          <mc:Fallback xmlns="">
             <p:pic>
               <p:nvPicPr>
                 <p:cNvPr id="78" name="Ink 77">
@@ -10586,8 +10591,8 @@
             </p:pic>
           </mc:Fallback>
         </mc:AlternateContent>
-        <mc:AlternateContent xmlns:mc="http://schemas.openxmlformats.org/markup-compatibility/2006">
-          <mc:Choice xmlns:p14="http://schemas.microsoft.com/office/powerpoint/2010/main" Requires="p14">
+        <mc:AlternateContent xmlns:mc="http://schemas.openxmlformats.org/markup-compatibility/2006" xmlns:p14="http://schemas.microsoft.com/office/powerpoint/2010/main">
+          <mc:Choice Requires="p14">
             <p:contentPart p14:bwMode="auto" r:id="rId134">
               <p14:nvContentPartPr>
                 <p14:cNvPr id="79" name="Ink 78">
@@ -10606,7 +10611,7 @@
               </p14:xfrm>
             </p:contentPart>
           </mc:Choice>
-          <mc:Fallback>
+          <mc:Fallback xmlns="">
             <p:pic>
               <p:nvPicPr>
                 <p:cNvPr id="79" name="Ink 78">
@@ -10637,8 +10642,8 @@
             </p:pic>
           </mc:Fallback>
         </mc:AlternateContent>
-        <mc:AlternateContent xmlns:mc="http://schemas.openxmlformats.org/markup-compatibility/2006">
-          <mc:Choice xmlns:p14="http://schemas.microsoft.com/office/powerpoint/2010/main" Requires="p14">
+        <mc:AlternateContent xmlns:mc="http://schemas.openxmlformats.org/markup-compatibility/2006" xmlns:p14="http://schemas.microsoft.com/office/powerpoint/2010/main">
+          <mc:Choice Requires="p14">
             <p:contentPart p14:bwMode="auto" r:id="rId136">
               <p14:nvContentPartPr>
                 <p14:cNvPr id="80" name="Ink 79">
@@ -10657,7 +10662,7 @@
               </p14:xfrm>
             </p:contentPart>
           </mc:Choice>
-          <mc:Fallback>
+          <mc:Fallback xmlns="">
             <p:pic>
               <p:nvPicPr>
                 <p:cNvPr id="80" name="Ink 79">
@@ -10688,8 +10693,8 @@
             </p:pic>
           </mc:Fallback>
         </mc:AlternateContent>
-        <mc:AlternateContent xmlns:mc="http://schemas.openxmlformats.org/markup-compatibility/2006">
-          <mc:Choice xmlns:p14="http://schemas.microsoft.com/office/powerpoint/2010/main" Requires="p14">
+        <mc:AlternateContent xmlns:mc="http://schemas.openxmlformats.org/markup-compatibility/2006" xmlns:p14="http://schemas.microsoft.com/office/powerpoint/2010/main">
+          <mc:Choice Requires="p14">
             <p:contentPart p14:bwMode="auto" r:id="rId138">
               <p14:nvContentPartPr>
                 <p14:cNvPr id="81" name="Ink 80">
@@ -10708,7 +10713,7 @@
               </p14:xfrm>
             </p:contentPart>
           </mc:Choice>
-          <mc:Fallback>
+          <mc:Fallback xmlns="">
             <p:pic>
               <p:nvPicPr>
                 <p:cNvPr id="81" name="Ink 80">
@@ -10739,8 +10744,8 @@
             </p:pic>
           </mc:Fallback>
         </mc:AlternateContent>
-        <mc:AlternateContent xmlns:mc="http://schemas.openxmlformats.org/markup-compatibility/2006">
-          <mc:Choice xmlns:p14="http://schemas.microsoft.com/office/powerpoint/2010/main" Requires="p14">
+        <mc:AlternateContent xmlns:mc="http://schemas.openxmlformats.org/markup-compatibility/2006" xmlns:p14="http://schemas.microsoft.com/office/powerpoint/2010/main">
+          <mc:Choice Requires="p14">
             <p:contentPart p14:bwMode="auto" r:id="rId140">
               <p14:nvContentPartPr>
                 <p14:cNvPr id="82" name="Ink 81">
@@ -10759,7 +10764,7 @@
               </p14:xfrm>
             </p:contentPart>
           </mc:Choice>
-          <mc:Fallback>
+          <mc:Fallback xmlns="">
             <p:pic>
               <p:nvPicPr>
                 <p:cNvPr id="82" name="Ink 81">
@@ -10790,8 +10795,8 @@
             </p:pic>
           </mc:Fallback>
         </mc:AlternateContent>
-        <mc:AlternateContent xmlns:mc="http://schemas.openxmlformats.org/markup-compatibility/2006">
-          <mc:Choice xmlns:p14="http://schemas.microsoft.com/office/powerpoint/2010/main" Requires="p14">
+        <mc:AlternateContent xmlns:mc="http://schemas.openxmlformats.org/markup-compatibility/2006" xmlns:p14="http://schemas.microsoft.com/office/powerpoint/2010/main">
+          <mc:Choice Requires="p14">
             <p:contentPart p14:bwMode="auto" r:id="rId142">
               <p14:nvContentPartPr>
                 <p14:cNvPr id="83" name="Ink 82">
@@ -10810,7 +10815,7 @@
               </p14:xfrm>
             </p:contentPart>
           </mc:Choice>
-          <mc:Fallback>
+          <mc:Fallback xmlns="">
             <p:pic>
               <p:nvPicPr>
                 <p:cNvPr id="83" name="Ink 82">
@@ -10841,8 +10846,8 @@
             </p:pic>
           </mc:Fallback>
         </mc:AlternateContent>
-        <mc:AlternateContent xmlns:mc="http://schemas.openxmlformats.org/markup-compatibility/2006">
-          <mc:Choice xmlns:p14="http://schemas.microsoft.com/office/powerpoint/2010/main" Requires="p14">
+        <mc:AlternateContent xmlns:mc="http://schemas.openxmlformats.org/markup-compatibility/2006" xmlns:p14="http://schemas.microsoft.com/office/powerpoint/2010/main">
+          <mc:Choice Requires="p14">
             <p:contentPart p14:bwMode="auto" r:id="rId144">
               <p14:nvContentPartPr>
                 <p14:cNvPr id="84" name="Ink 83">
@@ -10861,7 +10866,7 @@
               </p14:xfrm>
             </p:contentPart>
           </mc:Choice>
-          <mc:Fallback>
+          <mc:Fallback xmlns="">
             <p:pic>
               <p:nvPicPr>
                 <p:cNvPr id="84" name="Ink 83">
@@ -10913,8 +10918,8 @@
             <a:chExt cx="2865240" cy="992520"/>
           </a:xfrm>
         </p:grpSpPr>
-        <mc:AlternateContent xmlns:mc="http://schemas.openxmlformats.org/markup-compatibility/2006">
-          <mc:Choice xmlns:p14="http://schemas.microsoft.com/office/powerpoint/2010/main" Requires="p14">
+        <mc:AlternateContent xmlns:mc="http://schemas.openxmlformats.org/markup-compatibility/2006" xmlns:p14="http://schemas.microsoft.com/office/powerpoint/2010/main">
+          <mc:Choice Requires="p14">
             <p:contentPart p14:bwMode="auto" r:id="rId146">
               <p14:nvContentPartPr>
                 <p14:cNvPr id="94" name="Ink 93">
@@ -10933,7 +10938,7 @@
               </p14:xfrm>
             </p:contentPart>
           </mc:Choice>
-          <mc:Fallback>
+          <mc:Fallback xmlns="">
             <p:pic>
               <p:nvPicPr>
                 <p:cNvPr id="94" name="Ink 93">
@@ -10964,8 +10969,8 @@
             </p:pic>
           </mc:Fallback>
         </mc:AlternateContent>
-        <mc:AlternateContent xmlns:mc="http://schemas.openxmlformats.org/markup-compatibility/2006">
-          <mc:Choice xmlns:p14="http://schemas.microsoft.com/office/powerpoint/2010/main" Requires="p14">
+        <mc:AlternateContent xmlns:mc="http://schemas.openxmlformats.org/markup-compatibility/2006" xmlns:p14="http://schemas.microsoft.com/office/powerpoint/2010/main">
+          <mc:Choice Requires="p14">
             <p:contentPart p14:bwMode="auto" r:id="rId148">
               <p14:nvContentPartPr>
                 <p14:cNvPr id="95" name="Ink 94">
@@ -10984,7 +10989,7 @@
               </p14:xfrm>
             </p:contentPart>
           </mc:Choice>
-          <mc:Fallback>
+          <mc:Fallback xmlns="">
             <p:pic>
               <p:nvPicPr>
                 <p:cNvPr id="95" name="Ink 94">
@@ -11015,8 +11020,8 @@
             </p:pic>
           </mc:Fallback>
         </mc:AlternateContent>
-        <mc:AlternateContent xmlns:mc="http://schemas.openxmlformats.org/markup-compatibility/2006">
-          <mc:Choice xmlns:p14="http://schemas.microsoft.com/office/powerpoint/2010/main" Requires="p14">
+        <mc:AlternateContent xmlns:mc="http://schemas.openxmlformats.org/markup-compatibility/2006" xmlns:p14="http://schemas.microsoft.com/office/powerpoint/2010/main">
+          <mc:Choice Requires="p14">
             <p:contentPart p14:bwMode="auto" r:id="rId150">
               <p14:nvContentPartPr>
                 <p14:cNvPr id="96" name="Ink 95">
@@ -11035,7 +11040,7 @@
               </p14:xfrm>
             </p:contentPart>
           </mc:Choice>
-          <mc:Fallback>
+          <mc:Fallback xmlns="">
             <p:pic>
               <p:nvPicPr>
                 <p:cNvPr id="96" name="Ink 95">
@@ -11066,8 +11071,8 @@
             </p:pic>
           </mc:Fallback>
         </mc:AlternateContent>
-        <mc:AlternateContent xmlns:mc="http://schemas.openxmlformats.org/markup-compatibility/2006">
-          <mc:Choice xmlns:p14="http://schemas.microsoft.com/office/powerpoint/2010/main" Requires="p14">
+        <mc:AlternateContent xmlns:mc="http://schemas.openxmlformats.org/markup-compatibility/2006" xmlns:p14="http://schemas.microsoft.com/office/powerpoint/2010/main">
+          <mc:Choice Requires="p14">
             <p:contentPart p14:bwMode="auto" r:id="rId152">
               <p14:nvContentPartPr>
                 <p14:cNvPr id="97" name="Ink 96">
@@ -11086,7 +11091,7 @@
               </p14:xfrm>
             </p:contentPart>
           </mc:Choice>
-          <mc:Fallback>
+          <mc:Fallback xmlns="">
             <p:pic>
               <p:nvPicPr>
                 <p:cNvPr id="97" name="Ink 96">
@@ -11117,8 +11122,8 @@
             </p:pic>
           </mc:Fallback>
         </mc:AlternateContent>
-        <mc:AlternateContent xmlns:mc="http://schemas.openxmlformats.org/markup-compatibility/2006">
-          <mc:Choice xmlns:p14="http://schemas.microsoft.com/office/powerpoint/2010/main" Requires="p14">
+        <mc:AlternateContent xmlns:mc="http://schemas.openxmlformats.org/markup-compatibility/2006" xmlns:p14="http://schemas.microsoft.com/office/powerpoint/2010/main">
+          <mc:Choice Requires="p14">
             <p:contentPart p14:bwMode="auto" r:id="rId154">
               <p14:nvContentPartPr>
                 <p14:cNvPr id="100" name="Ink 99">
@@ -11137,7 +11142,7 @@
               </p14:xfrm>
             </p:contentPart>
           </mc:Choice>
-          <mc:Fallback>
+          <mc:Fallback xmlns="">
             <p:pic>
               <p:nvPicPr>
                 <p:cNvPr id="100" name="Ink 99">
@@ -11168,8 +11173,8 @@
             </p:pic>
           </mc:Fallback>
         </mc:AlternateContent>
-        <mc:AlternateContent xmlns:mc="http://schemas.openxmlformats.org/markup-compatibility/2006">
-          <mc:Choice xmlns:p14="http://schemas.microsoft.com/office/powerpoint/2010/main" Requires="p14">
+        <mc:AlternateContent xmlns:mc="http://schemas.openxmlformats.org/markup-compatibility/2006" xmlns:p14="http://schemas.microsoft.com/office/powerpoint/2010/main">
+          <mc:Choice Requires="p14">
             <p:contentPart p14:bwMode="auto" r:id="rId156">
               <p14:nvContentPartPr>
                 <p14:cNvPr id="101" name="Ink 100">
@@ -11188,7 +11193,7 @@
               </p14:xfrm>
             </p:contentPart>
           </mc:Choice>
-          <mc:Fallback>
+          <mc:Fallback xmlns="">
             <p:pic>
               <p:nvPicPr>
                 <p:cNvPr id="101" name="Ink 100">
@@ -11219,8 +11224,8 @@
             </p:pic>
           </mc:Fallback>
         </mc:AlternateContent>
-        <mc:AlternateContent xmlns:mc="http://schemas.openxmlformats.org/markup-compatibility/2006">
-          <mc:Choice xmlns:p14="http://schemas.microsoft.com/office/powerpoint/2010/main" Requires="p14">
+        <mc:AlternateContent xmlns:mc="http://schemas.openxmlformats.org/markup-compatibility/2006" xmlns:p14="http://schemas.microsoft.com/office/powerpoint/2010/main">
+          <mc:Choice Requires="p14">
             <p:contentPart p14:bwMode="auto" r:id="rId158">
               <p14:nvContentPartPr>
                 <p14:cNvPr id="103" name="Ink 102">
@@ -11239,7 +11244,7 @@
               </p14:xfrm>
             </p:contentPart>
           </mc:Choice>
-          <mc:Fallback>
+          <mc:Fallback xmlns="">
             <p:pic>
               <p:nvPicPr>
                 <p:cNvPr id="103" name="Ink 102">
@@ -11291,8 +11296,8 @@
             <a:chExt cx="2657880" cy="1315080"/>
           </a:xfrm>
         </p:grpSpPr>
-        <mc:AlternateContent xmlns:mc="http://schemas.openxmlformats.org/markup-compatibility/2006">
-          <mc:Choice xmlns:p14="http://schemas.microsoft.com/office/powerpoint/2010/main" Requires="p14">
+        <mc:AlternateContent xmlns:mc="http://schemas.openxmlformats.org/markup-compatibility/2006" xmlns:p14="http://schemas.microsoft.com/office/powerpoint/2010/main">
+          <mc:Choice Requires="p14">
             <p:contentPart p14:bwMode="auto" r:id="rId160">
               <p14:nvContentPartPr>
                 <p14:cNvPr id="89" name="Ink 88">
@@ -11311,7 +11316,7 @@
               </p14:xfrm>
             </p:contentPart>
           </mc:Choice>
-          <mc:Fallback>
+          <mc:Fallback xmlns="">
             <p:pic>
               <p:nvPicPr>
                 <p:cNvPr id="89" name="Ink 88">
@@ -11342,8 +11347,8 @@
             </p:pic>
           </mc:Fallback>
         </mc:AlternateContent>
-        <mc:AlternateContent xmlns:mc="http://schemas.openxmlformats.org/markup-compatibility/2006">
-          <mc:Choice xmlns:p14="http://schemas.microsoft.com/office/powerpoint/2010/main" Requires="p14">
+        <mc:AlternateContent xmlns:mc="http://schemas.openxmlformats.org/markup-compatibility/2006" xmlns:p14="http://schemas.microsoft.com/office/powerpoint/2010/main">
+          <mc:Choice Requires="p14">
             <p:contentPart p14:bwMode="auto" r:id="rId162">
               <p14:nvContentPartPr>
                 <p14:cNvPr id="91" name="Ink 90">
@@ -11362,7 +11367,7 @@
               </p14:xfrm>
             </p:contentPart>
           </mc:Choice>
-          <mc:Fallback>
+          <mc:Fallback xmlns="">
             <p:pic>
               <p:nvPicPr>
                 <p:cNvPr id="91" name="Ink 90">
@@ -11393,8 +11398,8 @@
             </p:pic>
           </mc:Fallback>
         </mc:AlternateContent>
-        <mc:AlternateContent xmlns:mc="http://schemas.openxmlformats.org/markup-compatibility/2006">
-          <mc:Choice xmlns:p14="http://schemas.microsoft.com/office/powerpoint/2010/main" Requires="p14">
+        <mc:AlternateContent xmlns:mc="http://schemas.openxmlformats.org/markup-compatibility/2006" xmlns:p14="http://schemas.microsoft.com/office/powerpoint/2010/main">
+          <mc:Choice Requires="p14">
             <p:contentPart p14:bwMode="auto" r:id="rId164">
               <p14:nvContentPartPr>
                 <p14:cNvPr id="104" name="Ink 103">
@@ -11413,7 +11418,7 @@
               </p14:xfrm>
             </p:contentPart>
           </mc:Choice>
-          <mc:Fallback>
+          <mc:Fallback xmlns="">
             <p:pic>
               <p:nvPicPr>
                 <p:cNvPr id="104" name="Ink 103">
@@ -11465,8 +11470,8 @@
             <a:chExt cx="1150200" cy="2501640"/>
           </a:xfrm>
         </p:grpSpPr>
-        <mc:AlternateContent xmlns:mc="http://schemas.openxmlformats.org/markup-compatibility/2006">
-          <mc:Choice xmlns:p14="http://schemas.microsoft.com/office/powerpoint/2010/main" Requires="p14">
+        <mc:AlternateContent xmlns:mc="http://schemas.openxmlformats.org/markup-compatibility/2006" xmlns:p14="http://schemas.microsoft.com/office/powerpoint/2010/main">
+          <mc:Choice Requires="p14">
             <p:contentPart p14:bwMode="auto" r:id="rId166">
               <p14:nvContentPartPr>
                 <p14:cNvPr id="90" name="Ink 89">
@@ -11485,7 +11490,7 @@
               </p14:xfrm>
             </p:contentPart>
           </mc:Choice>
-          <mc:Fallback>
+          <mc:Fallback xmlns="">
             <p:pic>
               <p:nvPicPr>
                 <p:cNvPr id="90" name="Ink 89">
@@ -11516,8 +11521,8 @@
             </p:pic>
           </mc:Fallback>
         </mc:AlternateContent>
-        <mc:AlternateContent xmlns:mc="http://schemas.openxmlformats.org/markup-compatibility/2006">
-          <mc:Choice xmlns:p14="http://schemas.microsoft.com/office/powerpoint/2010/main" Requires="p14">
+        <mc:AlternateContent xmlns:mc="http://schemas.openxmlformats.org/markup-compatibility/2006" xmlns:p14="http://schemas.microsoft.com/office/powerpoint/2010/main">
+          <mc:Choice Requires="p14">
             <p:contentPart p14:bwMode="auto" r:id="rId168">
               <p14:nvContentPartPr>
                 <p14:cNvPr id="93" name="Ink 92">
@@ -11536,7 +11541,7 @@
               </p14:xfrm>
             </p:contentPart>
           </mc:Choice>
-          <mc:Fallback>
+          <mc:Fallback xmlns="">
             <p:pic>
               <p:nvPicPr>
                 <p:cNvPr id="93" name="Ink 92">
@@ -11567,8 +11572,8 @@
             </p:pic>
           </mc:Fallback>
         </mc:AlternateContent>
-        <mc:AlternateContent xmlns:mc="http://schemas.openxmlformats.org/markup-compatibility/2006">
-          <mc:Choice xmlns:p14="http://schemas.microsoft.com/office/powerpoint/2010/main" Requires="p14">
+        <mc:AlternateContent xmlns:mc="http://schemas.openxmlformats.org/markup-compatibility/2006" xmlns:p14="http://schemas.microsoft.com/office/powerpoint/2010/main">
+          <mc:Choice Requires="p14">
             <p:contentPart p14:bwMode="auto" r:id="rId170">
               <p14:nvContentPartPr>
                 <p14:cNvPr id="107" name="Ink 106">
@@ -11587,7 +11592,7 @@
               </p14:xfrm>
             </p:contentPart>
           </mc:Choice>
-          <mc:Fallback>
+          <mc:Fallback xmlns="">
             <p:pic>
               <p:nvPicPr>
                 <p:cNvPr id="107" name="Ink 106">
@@ -11639,8 +11644,8 @@
             <a:chExt cx="1612440" cy="951840"/>
           </a:xfrm>
         </p:grpSpPr>
-        <mc:AlternateContent xmlns:mc="http://schemas.openxmlformats.org/markup-compatibility/2006">
-          <mc:Choice xmlns:p14="http://schemas.microsoft.com/office/powerpoint/2010/main" Requires="p14">
+        <mc:AlternateContent xmlns:mc="http://schemas.openxmlformats.org/markup-compatibility/2006" xmlns:p14="http://schemas.microsoft.com/office/powerpoint/2010/main">
+          <mc:Choice Requires="p14">
             <p:contentPart p14:bwMode="auto" r:id="rId172">
               <p14:nvContentPartPr>
                 <p14:cNvPr id="108" name="Ink 107">
@@ -11659,7 +11664,7 @@
               </p14:xfrm>
             </p:contentPart>
           </mc:Choice>
-          <mc:Fallback>
+          <mc:Fallback xmlns="">
             <p:pic>
               <p:nvPicPr>
                 <p:cNvPr id="108" name="Ink 107">
@@ -11690,8 +11695,8 @@
             </p:pic>
           </mc:Fallback>
         </mc:AlternateContent>
-        <mc:AlternateContent xmlns:mc="http://schemas.openxmlformats.org/markup-compatibility/2006">
-          <mc:Choice xmlns:p14="http://schemas.microsoft.com/office/powerpoint/2010/main" Requires="p14">
+        <mc:AlternateContent xmlns:mc="http://schemas.openxmlformats.org/markup-compatibility/2006" xmlns:p14="http://schemas.microsoft.com/office/powerpoint/2010/main">
+          <mc:Choice Requires="p14">
             <p:contentPart p14:bwMode="auto" r:id="rId174">
               <p14:nvContentPartPr>
                 <p14:cNvPr id="109" name="Ink 108">
@@ -11710,7 +11715,7 @@
               </p14:xfrm>
             </p:contentPart>
           </mc:Choice>
-          <mc:Fallback>
+          <mc:Fallback xmlns="">
             <p:pic>
               <p:nvPicPr>
                 <p:cNvPr id="109" name="Ink 108">
@@ -11741,8 +11746,8 @@
             </p:pic>
           </mc:Fallback>
         </mc:AlternateContent>
-        <mc:AlternateContent xmlns:mc="http://schemas.openxmlformats.org/markup-compatibility/2006">
-          <mc:Choice xmlns:p14="http://schemas.microsoft.com/office/powerpoint/2010/main" Requires="p14">
+        <mc:AlternateContent xmlns:mc="http://schemas.openxmlformats.org/markup-compatibility/2006" xmlns:p14="http://schemas.microsoft.com/office/powerpoint/2010/main">
+          <mc:Choice Requires="p14">
             <p:contentPart p14:bwMode="auto" r:id="rId176">
               <p14:nvContentPartPr>
                 <p14:cNvPr id="110" name="Ink 109">
@@ -11761,7 +11766,7 @@
               </p14:xfrm>
             </p:contentPart>
           </mc:Choice>
-          <mc:Fallback>
+          <mc:Fallback xmlns="">
             <p:pic>
               <p:nvPicPr>
                 <p:cNvPr id="110" name="Ink 109">
@@ -11792,8 +11797,8 @@
             </p:pic>
           </mc:Fallback>
         </mc:AlternateContent>
-        <mc:AlternateContent xmlns:mc="http://schemas.openxmlformats.org/markup-compatibility/2006">
-          <mc:Choice xmlns:p14="http://schemas.microsoft.com/office/powerpoint/2010/main" Requires="p14">
+        <mc:AlternateContent xmlns:mc="http://schemas.openxmlformats.org/markup-compatibility/2006" xmlns:p14="http://schemas.microsoft.com/office/powerpoint/2010/main">
+          <mc:Choice Requires="p14">
             <p:contentPart p14:bwMode="auto" r:id="rId178">
               <p14:nvContentPartPr>
                 <p14:cNvPr id="111" name="Ink 110">
@@ -11812,7 +11817,7 @@
               </p14:xfrm>
             </p:contentPart>
           </mc:Choice>
-          <mc:Fallback>
+          <mc:Fallback xmlns="">
             <p:pic>
               <p:nvPicPr>
                 <p:cNvPr id="111" name="Ink 110">
@@ -11843,8 +11848,8 @@
             </p:pic>
           </mc:Fallback>
         </mc:AlternateContent>
-        <mc:AlternateContent xmlns:mc="http://schemas.openxmlformats.org/markup-compatibility/2006">
-          <mc:Choice xmlns:p14="http://schemas.microsoft.com/office/powerpoint/2010/main" Requires="p14">
+        <mc:AlternateContent xmlns:mc="http://schemas.openxmlformats.org/markup-compatibility/2006" xmlns:p14="http://schemas.microsoft.com/office/powerpoint/2010/main">
+          <mc:Choice Requires="p14">
             <p:contentPart p14:bwMode="auto" r:id="rId180">
               <p14:nvContentPartPr>
                 <p14:cNvPr id="112" name="Ink 111">
@@ -11863,7 +11868,7 @@
               </p14:xfrm>
             </p:contentPart>
           </mc:Choice>
-          <mc:Fallback>
+          <mc:Fallback xmlns="">
             <p:pic>
               <p:nvPicPr>
                 <p:cNvPr id="112" name="Ink 111">
@@ -11915,8 +11920,8 @@
             <a:chExt cx="3859560" cy="936360"/>
           </a:xfrm>
         </p:grpSpPr>
-        <mc:AlternateContent xmlns:mc="http://schemas.openxmlformats.org/markup-compatibility/2006">
-          <mc:Choice xmlns:p14="http://schemas.microsoft.com/office/powerpoint/2010/main" Requires="p14">
+        <mc:AlternateContent xmlns:mc="http://schemas.openxmlformats.org/markup-compatibility/2006" xmlns:p14="http://schemas.microsoft.com/office/powerpoint/2010/main">
+          <mc:Choice Requires="p14">
             <p:contentPart p14:bwMode="auto" r:id="rId182">
               <p14:nvContentPartPr>
                 <p14:cNvPr id="113" name="Ink 112">
@@ -11935,7 +11940,7 @@
               </p14:xfrm>
             </p:contentPart>
           </mc:Choice>
-          <mc:Fallback>
+          <mc:Fallback xmlns="">
             <p:pic>
               <p:nvPicPr>
                 <p:cNvPr id="113" name="Ink 112">
@@ -11966,8 +11971,8 @@
             </p:pic>
           </mc:Fallback>
         </mc:AlternateContent>
-        <mc:AlternateContent xmlns:mc="http://schemas.openxmlformats.org/markup-compatibility/2006">
-          <mc:Choice xmlns:p14="http://schemas.microsoft.com/office/powerpoint/2010/main" Requires="p14">
+        <mc:AlternateContent xmlns:mc="http://schemas.openxmlformats.org/markup-compatibility/2006" xmlns:p14="http://schemas.microsoft.com/office/powerpoint/2010/main">
+          <mc:Choice Requires="p14">
             <p:contentPart p14:bwMode="auto" r:id="rId184">
               <p14:nvContentPartPr>
                 <p14:cNvPr id="114" name="Ink 113">
@@ -11986,7 +11991,7 @@
               </p14:xfrm>
             </p:contentPart>
           </mc:Choice>
-          <mc:Fallback>
+          <mc:Fallback xmlns="">
             <p:pic>
               <p:nvPicPr>
                 <p:cNvPr id="114" name="Ink 113">
@@ -12017,8 +12022,8 @@
             </p:pic>
           </mc:Fallback>
         </mc:AlternateContent>
-        <mc:AlternateContent xmlns:mc="http://schemas.openxmlformats.org/markup-compatibility/2006">
-          <mc:Choice xmlns:p14="http://schemas.microsoft.com/office/powerpoint/2010/main" Requires="p14">
+        <mc:AlternateContent xmlns:mc="http://schemas.openxmlformats.org/markup-compatibility/2006" xmlns:p14="http://schemas.microsoft.com/office/powerpoint/2010/main">
+          <mc:Choice Requires="p14">
             <p:contentPart p14:bwMode="auto" r:id="rId186">
               <p14:nvContentPartPr>
                 <p14:cNvPr id="115" name="Ink 114">
@@ -12037,7 +12042,7 @@
               </p14:xfrm>
             </p:contentPart>
           </mc:Choice>
-          <mc:Fallback>
+          <mc:Fallback xmlns="">
             <p:pic>
               <p:nvPicPr>
                 <p:cNvPr id="115" name="Ink 114">
@@ -12068,8 +12073,8 @@
             </p:pic>
           </mc:Fallback>
         </mc:AlternateContent>
-        <mc:AlternateContent xmlns:mc="http://schemas.openxmlformats.org/markup-compatibility/2006">
-          <mc:Choice xmlns:p14="http://schemas.microsoft.com/office/powerpoint/2010/main" Requires="p14">
+        <mc:AlternateContent xmlns:mc="http://schemas.openxmlformats.org/markup-compatibility/2006" xmlns:p14="http://schemas.microsoft.com/office/powerpoint/2010/main">
+          <mc:Choice Requires="p14">
             <p:contentPart p14:bwMode="auto" r:id="rId188">
               <p14:nvContentPartPr>
                 <p14:cNvPr id="116" name="Ink 115">
@@ -12088,7 +12093,7 @@
               </p14:xfrm>
             </p:contentPart>
           </mc:Choice>
-          <mc:Fallback>
+          <mc:Fallback xmlns="">
             <p:pic>
               <p:nvPicPr>
                 <p:cNvPr id="116" name="Ink 115">
@@ -12119,8 +12124,8 @@
             </p:pic>
           </mc:Fallback>
         </mc:AlternateContent>
-        <mc:AlternateContent xmlns:mc="http://schemas.openxmlformats.org/markup-compatibility/2006">
-          <mc:Choice xmlns:p14="http://schemas.microsoft.com/office/powerpoint/2010/main" Requires="p14">
+        <mc:AlternateContent xmlns:mc="http://schemas.openxmlformats.org/markup-compatibility/2006" xmlns:p14="http://schemas.microsoft.com/office/powerpoint/2010/main">
+          <mc:Choice Requires="p14">
             <p:contentPart p14:bwMode="auto" r:id="rId190">
               <p14:nvContentPartPr>
                 <p14:cNvPr id="117" name="Ink 116">
@@ -12139,7 +12144,7 @@
               </p14:xfrm>
             </p:contentPart>
           </mc:Choice>
-          <mc:Fallback>
+          <mc:Fallback xmlns="">
             <p:pic>
               <p:nvPicPr>
                 <p:cNvPr id="117" name="Ink 116">
@@ -12170,8 +12175,8 @@
             </p:pic>
           </mc:Fallback>
         </mc:AlternateContent>
-        <mc:AlternateContent xmlns:mc="http://schemas.openxmlformats.org/markup-compatibility/2006">
-          <mc:Choice xmlns:p14="http://schemas.microsoft.com/office/powerpoint/2010/main" Requires="p14">
+        <mc:AlternateContent xmlns:mc="http://schemas.openxmlformats.org/markup-compatibility/2006" xmlns:p14="http://schemas.microsoft.com/office/powerpoint/2010/main">
+          <mc:Choice Requires="p14">
             <p:contentPart p14:bwMode="auto" r:id="rId192">
               <p14:nvContentPartPr>
                 <p14:cNvPr id="118" name="Ink 117">
@@ -12190,7 +12195,7 @@
               </p14:xfrm>
             </p:contentPart>
           </mc:Choice>
-          <mc:Fallback>
+          <mc:Fallback xmlns="">
             <p:pic>
               <p:nvPicPr>
                 <p:cNvPr id="118" name="Ink 117">
@@ -12221,8 +12226,8 @@
             </p:pic>
           </mc:Fallback>
         </mc:AlternateContent>
-        <mc:AlternateContent xmlns:mc="http://schemas.openxmlformats.org/markup-compatibility/2006">
-          <mc:Choice xmlns:p14="http://schemas.microsoft.com/office/powerpoint/2010/main" Requires="p14">
+        <mc:AlternateContent xmlns:mc="http://schemas.openxmlformats.org/markup-compatibility/2006" xmlns:p14="http://schemas.microsoft.com/office/powerpoint/2010/main">
+          <mc:Choice Requires="p14">
             <p:contentPart p14:bwMode="auto" r:id="rId194">
               <p14:nvContentPartPr>
                 <p14:cNvPr id="119" name="Ink 118">
@@ -12241,7 +12246,7 @@
               </p14:xfrm>
             </p:contentPart>
           </mc:Choice>
-          <mc:Fallback>
+          <mc:Fallback xmlns="">
             <p:pic>
               <p:nvPicPr>
                 <p:cNvPr id="119" name="Ink 118">
@@ -12272,8 +12277,8 @@
             </p:pic>
           </mc:Fallback>
         </mc:AlternateContent>
-        <mc:AlternateContent xmlns:mc="http://schemas.openxmlformats.org/markup-compatibility/2006">
-          <mc:Choice xmlns:p14="http://schemas.microsoft.com/office/powerpoint/2010/main" Requires="p14">
+        <mc:AlternateContent xmlns:mc="http://schemas.openxmlformats.org/markup-compatibility/2006" xmlns:p14="http://schemas.microsoft.com/office/powerpoint/2010/main">
+          <mc:Choice Requires="p14">
             <p:contentPart p14:bwMode="auto" r:id="rId196">
               <p14:nvContentPartPr>
                 <p14:cNvPr id="120" name="Ink 119">
@@ -12292,7 +12297,7 @@
               </p14:xfrm>
             </p:contentPart>
           </mc:Choice>
-          <mc:Fallback>
+          <mc:Fallback xmlns="">
             <p:pic>
               <p:nvPicPr>
                 <p:cNvPr id="120" name="Ink 119">
@@ -12323,8 +12328,8 @@
             </p:pic>
           </mc:Fallback>
         </mc:AlternateContent>
-        <mc:AlternateContent xmlns:mc="http://schemas.openxmlformats.org/markup-compatibility/2006">
-          <mc:Choice xmlns:p14="http://schemas.microsoft.com/office/powerpoint/2010/main" Requires="p14">
+        <mc:AlternateContent xmlns:mc="http://schemas.openxmlformats.org/markup-compatibility/2006" xmlns:p14="http://schemas.microsoft.com/office/powerpoint/2010/main">
+          <mc:Choice Requires="p14">
             <p:contentPart p14:bwMode="auto" r:id="rId198">
               <p14:nvContentPartPr>
                 <p14:cNvPr id="121" name="Ink 120">
@@ -12343,7 +12348,7 @@
               </p14:xfrm>
             </p:contentPart>
           </mc:Choice>
-          <mc:Fallback>
+          <mc:Fallback xmlns="">
             <p:pic>
               <p:nvPicPr>
                 <p:cNvPr id="121" name="Ink 120">
@@ -12374,8 +12379,8 @@
             </p:pic>
           </mc:Fallback>
         </mc:AlternateContent>
-        <mc:AlternateContent xmlns:mc="http://schemas.openxmlformats.org/markup-compatibility/2006">
-          <mc:Choice xmlns:p14="http://schemas.microsoft.com/office/powerpoint/2010/main" Requires="p14">
+        <mc:AlternateContent xmlns:mc="http://schemas.openxmlformats.org/markup-compatibility/2006" xmlns:p14="http://schemas.microsoft.com/office/powerpoint/2010/main">
+          <mc:Choice Requires="p14">
             <p:contentPart p14:bwMode="auto" r:id="rId200">
               <p14:nvContentPartPr>
                 <p14:cNvPr id="125" name="Ink 124">
@@ -12394,7 +12399,7 @@
               </p14:xfrm>
             </p:contentPart>
           </mc:Choice>
-          <mc:Fallback>
+          <mc:Fallback xmlns="">
             <p:pic>
               <p:nvPicPr>
                 <p:cNvPr id="125" name="Ink 124">
@@ -12426,8 +12431,8 @@
           </mc:Fallback>
         </mc:AlternateContent>
       </p:grpSp>
-      <mc:AlternateContent xmlns:mc="http://schemas.openxmlformats.org/markup-compatibility/2006">
-        <mc:Choice xmlns:p14="http://schemas.microsoft.com/office/powerpoint/2010/main" Requires="p14">
+      <mc:AlternateContent xmlns:mc="http://schemas.openxmlformats.org/markup-compatibility/2006" xmlns:p14="http://schemas.microsoft.com/office/powerpoint/2010/main">
+        <mc:Choice Requires="p14">
           <p:contentPart p14:bwMode="auto" r:id="rId202">
             <p14:nvContentPartPr>
               <p14:cNvPr id="127" name="Ink 126">
@@ -12446,7 +12451,7 @@
             </p14:xfrm>
           </p:contentPart>
         </mc:Choice>
-        <mc:Fallback>
+        <mc:Fallback xmlns="">
           <p:pic>
             <p:nvPicPr>
               <p:cNvPr id="127" name="Ink 126">
@@ -12477,8 +12482,8 @@
           </p:pic>
         </mc:Fallback>
       </mc:AlternateContent>
-      <mc:AlternateContent xmlns:mc="http://schemas.openxmlformats.org/markup-compatibility/2006">
-        <mc:Choice xmlns:p14="http://schemas.microsoft.com/office/powerpoint/2010/main" Requires="p14">
+      <mc:AlternateContent xmlns:mc="http://schemas.openxmlformats.org/markup-compatibility/2006" xmlns:p14="http://schemas.microsoft.com/office/powerpoint/2010/main">
+        <mc:Choice Requires="p14">
           <p:contentPart p14:bwMode="auto" r:id="rId204">
             <p14:nvContentPartPr>
               <p14:cNvPr id="128" name="Ink 127">
@@ -12497,7 +12502,7 @@
             </p14:xfrm>
           </p:contentPart>
         </mc:Choice>
-        <mc:Fallback>
+        <mc:Fallback xmlns="">
           <p:pic>
             <p:nvPicPr>
               <p:cNvPr id="128" name="Ink 127">
@@ -12578,8 +12583,8 @@
             <a:chExt cx="1382400" cy="1044720"/>
           </a:xfrm>
         </p:grpSpPr>
-        <mc:AlternateContent xmlns:mc="http://schemas.openxmlformats.org/markup-compatibility/2006">
-          <mc:Choice xmlns:p14="http://schemas.microsoft.com/office/powerpoint/2010/main" Requires="p14">
+        <mc:AlternateContent xmlns:mc="http://schemas.openxmlformats.org/markup-compatibility/2006" xmlns:p14="http://schemas.microsoft.com/office/powerpoint/2010/main">
+          <mc:Choice Requires="p14">
             <p:contentPart p14:bwMode="auto" r:id="rId2">
               <p14:nvContentPartPr>
                 <p14:cNvPr id="2" name="Ink 1">
@@ -12598,7 +12603,7 @@
               </p14:xfrm>
             </p:contentPart>
           </mc:Choice>
-          <mc:Fallback>
+          <mc:Fallback xmlns="">
             <p:pic>
               <p:nvPicPr>
                 <p:cNvPr id="2" name="Ink 1">
@@ -12629,8 +12634,8 @@
             </p:pic>
           </mc:Fallback>
         </mc:AlternateContent>
-        <mc:AlternateContent xmlns:mc="http://schemas.openxmlformats.org/markup-compatibility/2006">
-          <mc:Choice xmlns:p14="http://schemas.microsoft.com/office/powerpoint/2010/main" Requires="p14">
+        <mc:AlternateContent xmlns:mc="http://schemas.openxmlformats.org/markup-compatibility/2006" xmlns:p14="http://schemas.microsoft.com/office/powerpoint/2010/main">
+          <mc:Choice Requires="p14">
             <p:contentPart p14:bwMode="auto" r:id="rId4">
               <p14:nvContentPartPr>
                 <p14:cNvPr id="3" name="Ink 2">
@@ -12649,7 +12654,7 @@
               </p14:xfrm>
             </p:contentPart>
           </mc:Choice>
-          <mc:Fallback>
+          <mc:Fallback xmlns="">
             <p:pic>
               <p:nvPicPr>
                 <p:cNvPr id="3" name="Ink 2">
@@ -12680,8 +12685,8 @@
             </p:pic>
           </mc:Fallback>
         </mc:AlternateContent>
-        <mc:AlternateContent xmlns:mc="http://schemas.openxmlformats.org/markup-compatibility/2006">
-          <mc:Choice xmlns:p14="http://schemas.microsoft.com/office/powerpoint/2010/main" Requires="p14">
+        <mc:AlternateContent xmlns:mc="http://schemas.openxmlformats.org/markup-compatibility/2006" xmlns:p14="http://schemas.microsoft.com/office/powerpoint/2010/main">
+          <mc:Choice Requires="p14">
             <p:contentPart p14:bwMode="auto" r:id="rId6">
               <p14:nvContentPartPr>
                 <p14:cNvPr id="4" name="Ink 3">
@@ -12700,7 +12705,7 @@
               </p14:xfrm>
             </p:contentPart>
           </mc:Choice>
-          <mc:Fallback>
+          <mc:Fallback xmlns="">
             <p:pic>
               <p:nvPicPr>
                 <p:cNvPr id="4" name="Ink 3">
@@ -12731,8 +12736,8 @@
             </p:pic>
           </mc:Fallback>
         </mc:AlternateContent>
-        <mc:AlternateContent xmlns:mc="http://schemas.openxmlformats.org/markup-compatibility/2006">
-          <mc:Choice xmlns:p14="http://schemas.microsoft.com/office/powerpoint/2010/main" Requires="p14">
+        <mc:AlternateContent xmlns:mc="http://schemas.openxmlformats.org/markup-compatibility/2006" xmlns:p14="http://schemas.microsoft.com/office/powerpoint/2010/main">
+          <mc:Choice Requires="p14">
             <p:contentPart p14:bwMode="auto" r:id="rId8">
               <p14:nvContentPartPr>
                 <p14:cNvPr id="5" name="Ink 4">
@@ -12751,7 +12756,7 @@
               </p14:xfrm>
             </p:contentPart>
           </mc:Choice>
-          <mc:Fallback>
+          <mc:Fallback xmlns="">
             <p:pic>
               <p:nvPicPr>
                 <p:cNvPr id="5" name="Ink 4">
@@ -12803,8 +12808,8 @@
             <a:chExt cx="3922200" cy="1423800"/>
           </a:xfrm>
         </p:grpSpPr>
-        <mc:AlternateContent xmlns:mc="http://schemas.openxmlformats.org/markup-compatibility/2006">
-          <mc:Choice xmlns:p14="http://schemas.microsoft.com/office/powerpoint/2010/main" Requires="p14">
+        <mc:AlternateContent xmlns:mc="http://schemas.openxmlformats.org/markup-compatibility/2006" xmlns:p14="http://schemas.microsoft.com/office/powerpoint/2010/main">
+          <mc:Choice Requires="p14">
             <p:contentPart p14:bwMode="auto" r:id="rId10">
               <p14:nvContentPartPr>
                 <p14:cNvPr id="6" name="Ink 5">
@@ -12823,7 +12828,7 @@
               </p14:xfrm>
             </p:contentPart>
           </mc:Choice>
-          <mc:Fallback>
+          <mc:Fallback xmlns="">
             <p:pic>
               <p:nvPicPr>
                 <p:cNvPr id="6" name="Ink 5">
@@ -12854,8 +12859,8 @@
             </p:pic>
           </mc:Fallback>
         </mc:AlternateContent>
-        <mc:AlternateContent xmlns:mc="http://schemas.openxmlformats.org/markup-compatibility/2006">
-          <mc:Choice xmlns:p14="http://schemas.microsoft.com/office/powerpoint/2010/main" Requires="p14">
+        <mc:AlternateContent xmlns:mc="http://schemas.openxmlformats.org/markup-compatibility/2006" xmlns:p14="http://schemas.microsoft.com/office/powerpoint/2010/main">
+          <mc:Choice Requires="p14">
             <p:contentPart p14:bwMode="auto" r:id="rId12">
               <p14:nvContentPartPr>
                 <p14:cNvPr id="7" name="Ink 6">
@@ -12874,7 +12879,7 @@
               </p14:xfrm>
             </p:contentPart>
           </mc:Choice>
-          <mc:Fallback>
+          <mc:Fallback xmlns="">
             <p:pic>
               <p:nvPicPr>
                 <p:cNvPr id="7" name="Ink 6">
@@ -12905,8 +12910,8 @@
             </p:pic>
           </mc:Fallback>
         </mc:AlternateContent>
-        <mc:AlternateContent xmlns:mc="http://schemas.openxmlformats.org/markup-compatibility/2006">
-          <mc:Choice xmlns:p14="http://schemas.microsoft.com/office/powerpoint/2010/main" Requires="p14">
+        <mc:AlternateContent xmlns:mc="http://schemas.openxmlformats.org/markup-compatibility/2006" xmlns:p14="http://schemas.microsoft.com/office/powerpoint/2010/main">
+          <mc:Choice Requires="p14">
             <p:contentPart p14:bwMode="auto" r:id="rId14">
               <p14:nvContentPartPr>
                 <p14:cNvPr id="8" name="Ink 7">
@@ -12925,7 +12930,7 @@
               </p14:xfrm>
             </p:contentPart>
           </mc:Choice>
-          <mc:Fallback>
+          <mc:Fallback xmlns="">
             <p:pic>
               <p:nvPicPr>
                 <p:cNvPr id="8" name="Ink 7">
@@ -12956,8 +12961,8 @@
             </p:pic>
           </mc:Fallback>
         </mc:AlternateContent>
-        <mc:AlternateContent xmlns:mc="http://schemas.openxmlformats.org/markup-compatibility/2006">
-          <mc:Choice xmlns:p14="http://schemas.microsoft.com/office/powerpoint/2010/main" Requires="p14">
+        <mc:AlternateContent xmlns:mc="http://schemas.openxmlformats.org/markup-compatibility/2006" xmlns:p14="http://schemas.microsoft.com/office/powerpoint/2010/main">
+          <mc:Choice Requires="p14">
             <p:contentPart p14:bwMode="auto" r:id="rId16">
               <p14:nvContentPartPr>
                 <p14:cNvPr id="11" name="Ink 10">
@@ -12976,7 +12981,7 @@
               </p14:xfrm>
             </p:contentPart>
           </mc:Choice>
-          <mc:Fallback>
+          <mc:Fallback xmlns="">
             <p:pic>
               <p:nvPicPr>
                 <p:cNvPr id="11" name="Ink 10">
@@ -13007,8 +13012,8 @@
             </p:pic>
           </mc:Fallback>
         </mc:AlternateContent>
-        <mc:AlternateContent xmlns:mc="http://schemas.openxmlformats.org/markup-compatibility/2006">
-          <mc:Choice xmlns:p14="http://schemas.microsoft.com/office/powerpoint/2010/main" Requires="p14">
+        <mc:AlternateContent xmlns:mc="http://schemas.openxmlformats.org/markup-compatibility/2006" xmlns:p14="http://schemas.microsoft.com/office/powerpoint/2010/main">
+          <mc:Choice Requires="p14">
             <p:contentPart p14:bwMode="auto" r:id="rId18">
               <p14:nvContentPartPr>
                 <p14:cNvPr id="12" name="Ink 11">
@@ -13027,7 +13032,7 @@
               </p14:xfrm>
             </p:contentPart>
           </mc:Choice>
-          <mc:Fallback>
+          <mc:Fallback xmlns="">
             <p:pic>
               <p:nvPicPr>
                 <p:cNvPr id="12" name="Ink 11">
@@ -13058,8 +13063,8 @@
             </p:pic>
           </mc:Fallback>
         </mc:AlternateContent>
-        <mc:AlternateContent xmlns:mc="http://schemas.openxmlformats.org/markup-compatibility/2006">
-          <mc:Choice xmlns:p14="http://schemas.microsoft.com/office/powerpoint/2010/main" Requires="p14">
+        <mc:AlternateContent xmlns:mc="http://schemas.openxmlformats.org/markup-compatibility/2006" xmlns:p14="http://schemas.microsoft.com/office/powerpoint/2010/main">
+          <mc:Choice Requires="p14">
             <p:contentPart p14:bwMode="auto" r:id="rId20">
               <p14:nvContentPartPr>
                 <p14:cNvPr id="13" name="Ink 12">
@@ -13078,7 +13083,7 @@
               </p14:xfrm>
             </p:contentPart>
           </mc:Choice>
-          <mc:Fallback>
+          <mc:Fallback xmlns="">
             <p:pic>
               <p:nvPicPr>
                 <p:cNvPr id="13" name="Ink 12">
@@ -13109,8 +13114,8 @@
             </p:pic>
           </mc:Fallback>
         </mc:AlternateContent>
-        <mc:AlternateContent xmlns:mc="http://schemas.openxmlformats.org/markup-compatibility/2006">
-          <mc:Choice xmlns:p14="http://schemas.microsoft.com/office/powerpoint/2010/main" Requires="p14">
+        <mc:AlternateContent xmlns:mc="http://schemas.openxmlformats.org/markup-compatibility/2006" xmlns:p14="http://schemas.microsoft.com/office/powerpoint/2010/main">
+          <mc:Choice Requires="p14">
             <p:contentPart p14:bwMode="auto" r:id="rId22">
               <p14:nvContentPartPr>
                 <p14:cNvPr id="14" name="Ink 13">
@@ -13129,7 +13134,7 @@
               </p14:xfrm>
             </p:contentPart>
           </mc:Choice>
-          <mc:Fallback>
+          <mc:Fallback xmlns="">
             <p:pic>
               <p:nvPicPr>
                 <p:cNvPr id="14" name="Ink 13">
@@ -13160,8 +13165,8 @@
             </p:pic>
           </mc:Fallback>
         </mc:AlternateContent>
-        <mc:AlternateContent xmlns:mc="http://schemas.openxmlformats.org/markup-compatibility/2006">
-          <mc:Choice xmlns:p14="http://schemas.microsoft.com/office/powerpoint/2010/main" Requires="p14">
+        <mc:AlternateContent xmlns:mc="http://schemas.openxmlformats.org/markup-compatibility/2006" xmlns:p14="http://schemas.microsoft.com/office/powerpoint/2010/main">
+          <mc:Choice Requires="p14">
             <p:contentPart p14:bwMode="auto" r:id="rId24">
               <p14:nvContentPartPr>
                 <p14:cNvPr id="15" name="Ink 14">
@@ -13180,7 +13185,7 @@
               </p14:xfrm>
             </p:contentPart>
           </mc:Choice>
-          <mc:Fallback>
+          <mc:Fallback xmlns="">
             <p:pic>
               <p:nvPicPr>
                 <p:cNvPr id="15" name="Ink 14">
@@ -13212,8 +13217,8 @@
           </mc:Fallback>
         </mc:AlternateContent>
       </p:grpSp>
-      <mc:AlternateContent xmlns:mc="http://schemas.openxmlformats.org/markup-compatibility/2006">
-        <mc:Choice xmlns:p14="http://schemas.microsoft.com/office/powerpoint/2010/main" Requires="p14">
+      <mc:AlternateContent xmlns:mc="http://schemas.openxmlformats.org/markup-compatibility/2006" xmlns:p14="http://schemas.microsoft.com/office/powerpoint/2010/main">
+        <mc:Choice Requires="p14">
           <p:contentPart p14:bwMode="auto" r:id="rId26">
             <p14:nvContentPartPr>
               <p14:cNvPr id="16" name="Ink 15">
@@ -13232,7 +13237,7 @@
             </p14:xfrm>
           </p:contentPart>
         </mc:Choice>
-        <mc:Fallback>
+        <mc:Fallback xmlns="">
           <p:pic>
             <p:nvPicPr>
               <p:cNvPr id="16" name="Ink 15">
@@ -13263,8 +13268,8 @@
           </p:pic>
         </mc:Fallback>
       </mc:AlternateContent>
-      <mc:AlternateContent xmlns:mc="http://schemas.openxmlformats.org/markup-compatibility/2006">
-        <mc:Choice xmlns:p14="http://schemas.microsoft.com/office/powerpoint/2010/main" Requires="p14">
+      <mc:AlternateContent xmlns:mc="http://schemas.openxmlformats.org/markup-compatibility/2006" xmlns:p14="http://schemas.microsoft.com/office/powerpoint/2010/main">
+        <mc:Choice Requires="p14">
           <p:contentPart p14:bwMode="auto" r:id="rId28">
             <p14:nvContentPartPr>
               <p14:cNvPr id="17" name="Ink 16">
@@ -13283,7 +13288,7 @@
             </p14:xfrm>
           </p:contentPart>
         </mc:Choice>
-        <mc:Fallback>
+        <mc:Fallback xmlns="">
           <p:pic>
             <p:nvPicPr>
               <p:cNvPr id="17" name="Ink 16">
@@ -13334,8 +13339,8 @@
             <a:chExt cx="1037520" cy="1092600"/>
           </a:xfrm>
         </p:grpSpPr>
-        <mc:AlternateContent xmlns:mc="http://schemas.openxmlformats.org/markup-compatibility/2006">
-          <mc:Choice xmlns:p14="http://schemas.microsoft.com/office/powerpoint/2010/main" Requires="p14">
+        <mc:AlternateContent xmlns:mc="http://schemas.openxmlformats.org/markup-compatibility/2006" xmlns:p14="http://schemas.microsoft.com/office/powerpoint/2010/main">
+          <mc:Choice Requires="p14">
             <p:contentPart p14:bwMode="auto" r:id="rId30">
               <p14:nvContentPartPr>
                 <p14:cNvPr id="20" name="Ink 19">
@@ -13354,7 +13359,7 @@
               </p14:xfrm>
             </p:contentPart>
           </mc:Choice>
-          <mc:Fallback>
+          <mc:Fallback xmlns="">
             <p:pic>
               <p:nvPicPr>
                 <p:cNvPr id="20" name="Ink 19">
@@ -13385,8 +13390,8 @@
             </p:pic>
           </mc:Fallback>
         </mc:AlternateContent>
-        <mc:AlternateContent xmlns:mc="http://schemas.openxmlformats.org/markup-compatibility/2006">
-          <mc:Choice xmlns:p14="http://schemas.microsoft.com/office/powerpoint/2010/main" Requires="p14">
+        <mc:AlternateContent xmlns:mc="http://schemas.openxmlformats.org/markup-compatibility/2006" xmlns:p14="http://schemas.microsoft.com/office/powerpoint/2010/main">
+          <mc:Choice Requires="p14">
             <p:contentPart p14:bwMode="auto" r:id="rId32">
               <p14:nvContentPartPr>
                 <p14:cNvPr id="21" name="Ink 20">
@@ -13405,7 +13410,7 @@
               </p14:xfrm>
             </p:contentPart>
           </mc:Choice>
-          <mc:Fallback>
+          <mc:Fallback xmlns="">
             <p:pic>
               <p:nvPicPr>
                 <p:cNvPr id="21" name="Ink 20">
@@ -13437,8 +13442,8 @@
           </mc:Fallback>
         </mc:AlternateContent>
       </p:grpSp>
-      <mc:AlternateContent xmlns:mc="http://schemas.openxmlformats.org/markup-compatibility/2006">
-        <mc:Choice xmlns:p14="http://schemas.microsoft.com/office/powerpoint/2010/main" Requires="p14">
+      <mc:AlternateContent xmlns:mc="http://schemas.openxmlformats.org/markup-compatibility/2006" xmlns:p14="http://schemas.microsoft.com/office/powerpoint/2010/main">
+        <mc:Choice Requires="p14">
           <p:contentPart p14:bwMode="auto" r:id="rId34">
             <p14:nvContentPartPr>
               <p14:cNvPr id="31" name="Ink 30">
@@ -13457,7 +13462,7 @@
             </p14:xfrm>
           </p:contentPart>
         </mc:Choice>
-        <mc:Fallback>
+        <mc:Fallback xmlns="">
           <p:pic>
             <p:nvPicPr>
               <p:cNvPr id="31" name="Ink 30">
@@ -13508,8 +13513,8 @@
             <a:chExt cx="2369880" cy="2659320"/>
           </a:xfrm>
         </p:grpSpPr>
-        <mc:AlternateContent xmlns:mc="http://schemas.openxmlformats.org/markup-compatibility/2006">
-          <mc:Choice xmlns:p14="http://schemas.microsoft.com/office/powerpoint/2010/main" Requires="p14">
+        <mc:AlternateContent xmlns:mc="http://schemas.openxmlformats.org/markup-compatibility/2006" xmlns:p14="http://schemas.microsoft.com/office/powerpoint/2010/main">
+          <mc:Choice Requires="p14">
             <p:contentPart p14:bwMode="auto" r:id="rId36">
               <p14:nvContentPartPr>
                 <p14:cNvPr id="23" name="Ink 22">
@@ -13528,7 +13533,7 @@
               </p14:xfrm>
             </p:contentPart>
           </mc:Choice>
-          <mc:Fallback>
+          <mc:Fallback xmlns="">
             <p:pic>
               <p:nvPicPr>
                 <p:cNvPr id="23" name="Ink 22">
@@ -13559,8 +13564,8 @@
             </p:pic>
           </mc:Fallback>
         </mc:AlternateContent>
-        <mc:AlternateContent xmlns:mc="http://schemas.openxmlformats.org/markup-compatibility/2006">
-          <mc:Choice xmlns:p14="http://schemas.microsoft.com/office/powerpoint/2010/main" Requires="p14">
+        <mc:AlternateContent xmlns:mc="http://schemas.openxmlformats.org/markup-compatibility/2006" xmlns:p14="http://schemas.microsoft.com/office/powerpoint/2010/main">
+          <mc:Choice Requires="p14">
             <p:contentPart p14:bwMode="auto" r:id="rId38">
               <p14:nvContentPartPr>
                 <p14:cNvPr id="24" name="Ink 23">
@@ -13579,7 +13584,7 @@
               </p14:xfrm>
             </p:contentPart>
           </mc:Choice>
-          <mc:Fallback>
+          <mc:Fallback xmlns="">
             <p:pic>
               <p:nvPicPr>
                 <p:cNvPr id="24" name="Ink 23">
@@ -13610,8 +13615,8 @@
             </p:pic>
           </mc:Fallback>
         </mc:AlternateContent>
-        <mc:AlternateContent xmlns:mc="http://schemas.openxmlformats.org/markup-compatibility/2006">
-          <mc:Choice xmlns:p14="http://schemas.microsoft.com/office/powerpoint/2010/main" Requires="p14">
+        <mc:AlternateContent xmlns:mc="http://schemas.openxmlformats.org/markup-compatibility/2006" xmlns:p14="http://schemas.microsoft.com/office/powerpoint/2010/main">
+          <mc:Choice Requires="p14">
             <p:contentPart p14:bwMode="auto" r:id="rId40">
               <p14:nvContentPartPr>
                 <p14:cNvPr id="30" name="Ink 29">
@@ -13630,7 +13635,7 @@
               </p14:xfrm>
             </p:contentPart>
           </mc:Choice>
-          <mc:Fallback>
+          <mc:Fallback xmlns="">
             <p:pic>
               <p:nvPicPr>
                 <p:cNvPr id="30" name="Ink 29">
@@ -13661,8 +13666,8 @@
             </p:pic>
           </mc:Fallback>
         </mc:AlternateContent>
-        <mc:AlternateContent xmlns:mc="http://schemas.openxmlformats.org/markup-compatibility/2006">
-          <mc:Choice xmlns:p14="http://schemas.microsoft.com/office/powerpoint/2010/main" Requires="p14">
+        <mc:AlternateContent xmlns:mc="http://schemas.openxmlformats.org/markup-compatibility/2006" xmlns:p14="http://schemas.microsoft.com/office/powerpoint/2010/main">
+          <mc:Choice Requires="p14">
             <p:contentPart p14:bwMode="auto" r:id="rId42">
               <p14:nvContentPartPr>
                 <p14:cNvPr id="33" name="Ink 32">
@@ -13681,7 +13686,7 @@
               </p14:xfrm>
             </p:contentPart>
           </mc:Choice>
-          <mc:Fallback>
+          <mc:Fallback xmlns="">
             <p:pic>
               <p:nvPicPr>
                 <p:cNvPr id="33" name="Ink 32">
@@ -13712,8 +13717,8 @@
             </p:pic>
           </mc:Fallback>
         </mc:AlternateContent>
-        <mc:AlternateContent xmlns:mc="http://schemas.openxmlformats.org/markup-compatibility/2006">
-          <mc:Choice xmlns:p14="http://schemas.microsoft.com/office/powerpoint/2010/main" Requires="p14">
+        <mc:AlternateContent xmlns:mc="http://schemas.openxmlformats.org/markup-compatibility/2006" xmlns:p14="http://schemas.microsoft.com/office/powerpoint/2010/main">
+          <mc:Choice Requires="p14">
             <p:contentPart p14:bwMode="auto" r:id="rId44">
               <p14:nvContentPartPr>
                 <p14:cNvPr id="34" name="Ink 33">
@@ -13732,7 +13737,7 @@
               </p14:xfrm>
             </p:contentPart>
           </mc:Choice>
-          <mc:Fallback>
+          <mc:Fallback xmlns="">
             <p:pic>
               <p:nvPicPr>
                 <p:cNvPr id="34" name="Ink 33">
@@ -13764,8 +13769,8 @@
           </mc:Fallback>
         </mc:AlternateContent>
       </p:grpSp>
-      <mc:AlternateContent xmlns:mc="http://schemas.openxmlformats.org/markup-compatibility/2006">
-        <mc:Choice xmlns:p14="http://schemas.microsoft.com/office/powerpoint/2010/main" Requires="p14">
+      <mc:AlternateContent xmlns:mc="http://schemas.openxmlformats.org/markup-compatibility/2006" xmlns:p14="http://schemas.microsoft.com/office/powerpoint/2010/main">
+        <mc:Choice Requires="p14">
           <p:contentPart p14:bwMode="auto" r:id="rId46">
             <p14:nvContentPartPr>
               <p14:cNvPr id="36" name="Ink 35">
@@ -13784,7 +13789,7 @@
             </p14:xfrm>
           </p:contentPart>
         </mc:Choice>
-        <mc:Fallback>
+        <mc:Fallback xmlns="">
           <p:pic>
             <p:nvPicPr>
               <p:cNvPr id="36" name="Ink 35">
@@ -13835,8 +13840,8 @@
             <a:chExt cx="3457800" cy="2488680"/>
           </a:xfrm>
         </p:grpSpPr>
-        <mc:AlternateContent xmlns:mc="http://schemas.openxmlformats.org/markup-compatibility/2006">
-          <mc:Choice xmlns:p14="http://schemas.microsoft.com/office/powerpoint/2010/main" Requires="p14">
+        <mc:AlternateContent xmlns:mc="http://schemas.openxmlformats.org/markup-compatibility/2006" xmlns:p14="http://schemas.microsoft.com/office/powerpoint/2010/main">
+          <mc:Choice Requires="p14">
             <p:contentPart p14:bwMode="auto" r:id="rId48">
               <p14:nvContentPartPr>
                 <p14:cNvPr id="25" name="Ink 24">
@@ -13855,7 +13860,7 @@
               </p14:xfrm>
             </p:contentPart>
           </mc:Choice>
-          <mc:Fallback>
+          <mc:Fallback xmlns="">
             <p:pic>
               <p:nvPicPr>
                 <p:cNvPr id="25" name="Ink 24">
@@ -13886,8 +13891,8 @@
             </p:pic>
           </mc:Fallback>
         </mc:AlternateContent>
-        <mc:AlternateContent xmlns:mc="http://schemas.openxmlformats.org/markup-compatibility/2006">
-          <mc:Choice xmlns:p14="http://schemas.microsoft.com/office/powerpoint/2010/main" Requires="p14">
+        <mc:AlternateContent xmlns:mc="http://schemas.openxmlformats.org/markup-compatibility/2006" xmlns:p14="http://schemas.microsoft.com/office/powerpoint/2010/main">
+          <mc:Choice Requires="p14">
             <p:contentPart p14:bwMode="auto" r:id="rId50">
               <p14:nvContentPartPr>
                 <p14:cNvPr id="27" name="Ink 26">
@@ -13906,7 +13911,7 @@
               </p14:xfrm>
             </p:contentPart>
           </mc:Choice>
-          <mc:Fallback>
+          <mc:Fallback xmlns="">
             <p:pic>
               <p:nvPicPr>
                 <p:cNvPr id="27" name="Ink 26">
@@ -13937,8 +13942,8 @@
             </p:pic>
           </mc:Fallback>
         </mc:AlternateContent>
-        <mc:AlternateContent xmlns:mc="http://schemas.openxmlformats.org/markup-compatibility/2006">
-          <mc:Choice xmlns:p14="http://schemas.microsoft.com/office/powerpoint/2010/main" Requires="p14">
+        <mc:AlternateContent xmlns:mc="http://schemas.openxmlformats.org/markup-compatibility/2006" xmlns:p14="http://schemas.microsoft.com/office/powerpoint/2010/main">
+          <mc:Choice Requires="p14">
             <p:contentPart p14:bwMode="auto" r:id="rId52">
               <p14:nvContentPartPr>
                 <p14:cNvPr id="28" name="Ink 27">
@@ -13957,7 +13962,7 @@
               </p14:xfrm>
             </p:contentPart>
           </mc:Choice>
-          <mc:Fallback>
+          <mc:Fallback xmlns="">
             <p:pic>
               <p:nvPicPr>
                 <p:cNvPr id="28" name="Ink 27">
@@ -13988,8 +13993,8 @@
             </p:pic>
           </mc:Fallback>
         </mc:AlternateContent>
-        <mc:AlternateContent xmlns:mc="http://schemas.openxmlformats.org/markup-compatibility/2006">
-          <mc:Choice xmlns:p14="http://schemas.microsoft.com/office/powerpoint/2010/main" Requires="p14">
+        <mc:AlternateContent xmlns:mc="http://schemas.openxmlformats.org/markup-compatibility/2006" xmlns:p14="http://schemas.microsoft.com/office/powerpoint/2010/main">
+          <mc:Choice Requires="p14">
             <p:contentPart p14:bwMode="auto" r:id="rId54">
               <p14:nvContentPartPr>
                 <p14:cNvPr id="38" name="Ink 37">
@@ -14008,7 +14013,7 @@
               </p14:xfrm>
             </p:contentPart>
           </mc:Choice>
-          <mc:Fallback>
+          <mc:Fallback xmlns="">
             <p:pic>
               <p:nvPicPr>
                 <p:cNvPr id="38" name="Ink 37">
@@ -14039,8 +14044,8 @@
             </p:pic>
           </mc:Fallback>
         </mc:AlternateContent>
-        <mc:AlternateContent xmlns:mc="http://schemas.openxmlformats.org/markup-compatibility/2006">
-          <mc:Choice xmlns:p14="http://schemas.microsoft.com/office/powerpoint/2010/main" Requires="p14">
+        <mc:AlternateContent xmlns:mc="http://schemas.openxmlformats.org/markup-compatibility/2006" xmlns:p14="http://schemas.microsoft.com/office/powerpoint/2010/main">
+          <mc:Choice Requires="p14">
             <p:contentPart p14:bwMode="auto" r:id="rId56">
               <p14:nvContentPartPr>
                 <p14:cNvPr id="39" name="Ink 38">
@@ -14059,7 +14064,7 @@
               </p14:xfrm>
             </p:contentPart>
           </mc:Choice>
-          <mc:Fallback>
+          <mc:Fallback xmlns="">
             <p:pic>
               <p:nvPicPr>
                 <p:cNvPr id="39" name="Ink 38">
@@ -14811,6 +14816,6 @@
 
 <file path=docMetadata/LabelInfo.xml><?xml version="1.0" encoding="utf-8"?>
 <clbl:labelList xmlns:clbl="http://schemas.microsoft.com/office/2020/mipLabelMetadata">
-  <clbl:label id="{f42aa342-8706-4288-bd11-ebb85995028c}" enabled="1" method="Standard" siteId="{72f988bf-86f1-41af-91ab-2d7cd011db47}" contentBits="0" removed="0"/>
+  <clbl:label id="{87ba5c36-b7cf-4793-bbc2-bd5b3a9f95ca}" enabled="1" method="Privileged" siteId="{72f988bf-86f1-41af-91ab-2d7cd011db47}" contentBits="0" removed="0"/>
 </clbl:labelList>
 </file>